--- a/assets/img/affiliations/compound_logo.pptx
+++ b/assets/img/affiliations/compound_logo.pptx
@@ -1,12 +1,12 @@
 
 <file path=ppt/presentation.xml><?xml version="1.0" encoding="utf-8"?>
-<p:presentation xmlns:a="http://schemas.openxmlformats.org/drawingml/2006/main" xmlns:r="http://schemas.openxmlformats.org/officeDocument/2006/relationships" xmlns:p="http://schemas.openxmlformats.org/presentationml/2006/main" saveSubsetFonts="1">
+<p:presentation xmlns:a="http://schemas.openxmlformats.org/drawingml/2006/main" xmlns:r="http://schemas.openxmlformats.org/officeDocument/2006/relationships" xmlns:p="http://schemas.openxmlformats.org/presentationml/2006/main">
   <p:sldMasterIdLst>
     <p:sldMasterId id="2147483648" r:id="rId1"/>
   </p:sldMasterIdLst>
   <p:sldIdLst>
-    <p:sldId id="257" r:id="rId2"/>
-    <p:sldId id="256" r:id="rId3"/>
+    <p:sldId id="257" r:id="rId3"/>
+    <p:sldId id="256" r:id="rId4"/>
   </p:sldIdLst>
   <p:sldSz cx="12192000" cy="6858000"/>
   <p:notesSz cx="6858000" cy="9144000"/>
@@ -105,11 +105,6 @@
       </a:defRPr>
     </a:lvl9pPr>
   </p:defaultTextStyle>
-  <p:extLst>
-    <p:ext uri="{EFAFB233-063F-42B5-8137-9DF3F51BA10A}">
-      <p15:sldGuideLst xmlns:p15="http://schemas.microsoft.com/office/powerpoint/2012/main"/>
-    </p:ext>
-  </p:extLst>
 </p:presentation>
 </file>
 
@@ -132,13 +127,7 @@
       </p:grpSpPr>
       <p:sp>
         <p:nvSpPr>
-          <p:cNvPr id="2" name="标题 1">
-            <a:extLst>
-              <a:ext uri="{FF2B5EF4-FFF2-40B4-BE49-F238E27FC236}">
-                <a16:creationId xmlns:a16="http://schemas.microsoft.com/office/drawing/2014/main" id="{86EE35BE-612A-4C82-A902-5D9ACB0BE8B7}"/>
-              </a:ext>
-            </a:extLst>
-          </p:cNvPr>
+          <p:cNvPr id="2" name="标题 1"/>
           <p:cNvSpPr>
             <a:spLocks noGrp="1"/>
           </p:cNvSpPr>
@@ -170,13 +159,7 @@
       </p:sp>
       <p:sp>
         <p:nvSpPr>
-          <p:cNvPr id="3" name="副标题 2">
-            <a:extLst>
-              <a:ext uri="{FF2B5EF4-FFF2-40B4-BE49-F238E27FC236}">
-                <a16:creationId xmlns:a16="http://schemas.microsoft.com/office/drawing/2014/main" id="{DD490F3F-6CC9-4C35-AC61-FDD1C50A535B}"/>
-              </a:ext>
-            </a:extLst>
-          </p:cNvPr>
+          <p:cNvPr id="3" name="副标题 2"/>
           <p:cNvSpPr>
             <a:spLocks noGrp="1"/>
           </p:cNvSpPr>
@@ -241,13 +224,7 @@
       </p:sp>
       <p:sp>
         <p:nvSpPr>
-          <p:cNvPr id="4" name="日期占位符 3">
-            <a:extLst>
-              <a:ext uri="{FF2B5EF4-FFF2-40B4-BE49-F238E27FC236}">
-                <a16:creationId xmlns:a16="http://schemas.microsoft.com/office/drawing/2014/main" id="{4A430CDD-0EB5-4DD0-AF90-A6DC2C2432DF}"/>
-              </a:ext>
-            </a:extLst>
-          </p:cNvPr>
+          <p:cNvPr id="4" name="日期占位符 3"/>
           <p:cNvSpPr>
             <a:spLocks noGrp="1"/>
           </p:cNvSpPr>
@@ -262,7 +239,6 @@
           <a:p>
             <a:fld id="{EF4F237D-D39F-437D-B58E-A56F132280E9}" type="datetimeFigureOut">
               <a:rPr lang="en-US" smtClean="0"/>
-              <a:t>3/29/2024</a:t>
             </a:fld>
             <a:endParaRPr lang="en-US"/>
           </a:p>
@@ -270,13 +246,7 @@
       </p:sp>
       <p:sp>
         <p:nvSpPr>
-          <p:cNvPr id="5" name="页脚占位符 4">
-            <a:extLst>
-              <a:ext uri="{FF2B5EF4-FFF2-40B4-BE49-F238E27FC236}">
-                <a16:creationId xmlns:a16="http://schemas.microsoft.com/office/drawing/2014/main" id="{E914C0D2-7D4C-4F18-A300-B55D5B3C922C}"/>
-              </a:ext>
-            </a:extLst>
-          </p:cNvPr>
+          <p:cNvPr id="5" name="页脚占位符 4"/>
           <p:cNvSpPr>
             <a:spLocks noGrp="1"/>
           </p:cNvSpPr>
@@ -295,13 +265,7 @@
       </p:sp>
       <p:sp>
         <p:nvSpPr>
-          <p:cNvPr id="6" name="灯片编号占位符 5">
-            <a:extLst>
-              <a:ext uri="{FF2B5EF4-FFF2-40B4-BE49-F238E27FC236}">
-                <a16:creationId xmlns:a16="http://schemas.microsoft.com/office/drawing/2014/main" id="{7FC76559-DFDB-4FC5-A528-D24D59C82395}"/>
-              </a:ext>
-            </a:extLst>
-          </p:cNvPr>
+          <p:cNvPr id="6" name="灯片编号占位符 5"/>
           <p:cNvSpPr>
             <a:spLocks noGrp="1"/>
           </p:cNvSpPr>
@@ -316,18 +280,12 @@
           <a:p>
             <a:fld id="{0A805578-4521-47B2-8AD5-D762FC1C9EF5}" type="slidenum">
               <a:rPr lang="en-US" smtClean="0"/>
-              <a:t>‹#›</a:t>
             </a:fld>
             <a:endParaRPr lang="en-US"/>
           </a:p>
         </p:txBody>
       </p:sp>
     </p:spTree>
-    <p:extLst>
-      <p:ext uri="{BB962C8B-B14F-4D97-AF65-F5344CB8AC3E}">
-        <p14:creationId xmlns:p14="http://schemas.microsoft.com/office/powerpoint/2010/main" val="4019613681"/>
-      </p:ext>
-    </p:extLst>
   </p:cSld>
   <p:clrMapOvr>
     <a:masterClrMapping/>
@@ -354,13 +312,7 @@
       </p:grpSpPr>
       <p:sp>
         <p:nvSpPr>
-          <p:cNvPr id="2" name="标题 1">
-            <a:extLst>
-              <a:ext uri="{FF2B5EF4-FFF2-40B4-BE49-F238E27FC236}">
-                <a16:creationId xmlns:a16="http://schemas.microsoft.com/office/drawing/2014/main" id="{204530D5-CFA9-4F75-9D10-943C2EF23FDD}"/>
-              </a:ext>
-            </a:extLst>
-          </p:cNvPr>
+          <p:cNvPr id="2" name="标题 1"/>
           <p:cNvSpPr>
             <a:spLocks noGrp="1"/>
           </p:cNvSpPr>
@@ -383,18 +335,12 @@
       </p:sp>
       <p:sp>
         <p:nvSpPr>
-          <p:cNvPr id="3" name="竖排文字占位符 2">
-            <a:extLst>
-              <a:ext uri="{FF2B5EF4-FFF2-40B4-BE49-F238E27FC236}">
-                <a16:creationId xmlns:a16="http://schemas.microsoft.com/office/drawing/2014/main" id="{A16F68A2-E8BE-43B2-AD6C-4BABB0746B8B}"/>
-              </a:ext>
-            </a:extLst>
-          </p:cNvPr>
-          <p:cNvSpPr>
-            <a:spLocks noGrp="1"/>
-          </p:cNvSpPr>
-          <p:nvPr>
-            <p:ph type="body" orient="vert" idx="1"/>
+          <p:cNvPr id="3" name="竖排文字占位符 2"/>
+          <p:cNvSpPr>
+            <a:spLocks noGrp="1"/>
+          </p:cNvSpPr>
+          <p:nvPr>
+            <p:ph type="body" orient="vert" idx="1" hasCustomPrompt="1"/>
           </p:nvPr>
         </p:nvSpPr>
         <p:spPr/>
@@ -407,6 +353,7 @@
               <a:rPr lang="zh-CN" altLang="en-US"/>
               <a:t>编辑母版文本样式</a:t>
             </a:r>
+            <a:endParaRPr lang="zh-CN" altLang="en-US"/>
           </a:p>
           <a:p>
             <a:pPr lvl="1"/>
@@ -414,6 +361,7 @@
               <a:rPr lang="zh-CN" altLang="en-US"/>
               <a:t>第二级</a:t>
             </a:r>
+            <a:endParaRPr lang="zh-CN" altLang="en-US"/>
           </a:p>
           <a:p>
             <a:pPr lvl="2"/>
@@ -421,6 +369,7 @@
               <a:rPr lang="zh-CN" altLang="en-US"/>
               <a:t>第三级</a:t>
             </a:r>
+            <a:endParaRPr lang="zh-CN" altLang="en-US"/>
           </a:p>
           <a:p>
             <a:pPr lvl="3"/>
@@ -428,6 +377,7 @@
               <a:rPr lang="zh-CN" altLang="en-US"/>
               <a:t>第四级</a:t>
             </a:r>
+            <a:endParaRPr lang="zh-CN" altLang="en-US"/>
           </a:p>
           <a:p>
             <a:pPr lvl="4"/>
@@ -441,13 +391,7 @@
       </p:sp>
       <p:sp>
         <p:nvSpPr>
-          <p:cNvPr id="4" name="日期占位符 3">
-            <a:extLst>
-              <a:ext uri="{FF2B5EF4-FFF2-40B4-BE49-F238E27FC236}">
-                <a16:creationId xmlns:a16="http://schemas.microsoft.com/office/drawing/2014/main" id="{A8B37E17-B098-43DE-8B99-BD29DEBFACF7}"/>
-              </a:ext>
-            </a:extLst>
-          </p:cNvPr>
+          <p:cNvPr id="4" name="日期占位符 3"/>
           <p:cNvSpPr>
             <a:spLocks noGrp="1"/>
           </p:cNvSpPr>
@@ -462,7 +406,6 @@
           <a:p>
             <a:fld id="{EF4F237D-D39F-437D-B58E-A56F132280E9}" type="datetimeFigureOut">
               <a:rPr lang="en-US" smtClean="0"/>
-              <a:t>3/29/2024</a:t>
             </a:fld>
             <a:endParaRPr lang="en-US"/>
           </a:p>
@@ -470,13 +413,7 @@
       </p:sp>
       <p:sp>
         <p:nvSpPr>
-          <p:cNvPr id="5" name="页脚占位符 4">
-            <a:extLst>
-              <a:ext uri="{FF2B5EF4-FFF2-40B4-BE49-F238E27FC236}">
-                <a16:creationId xmlns:a16="http://schemas.microsoft.com/office/drawing/2014/main" id="{E29A3D4A-7C4B-427E-A342-CE96BDB419FF}"/>
-              </a:ext>
-            </a:extLst>
-          </p:cNvPr>
+          <p:cNvPr id="5" name="页脚占位符 4"/>
           <p:cNvSpPr>
             <a:spLocks noGrp="1"/>
           </p:cNvSpPr>
@@ -495,13 +432,7 @@
       </p:sp>
       <p:sp>
         <p:nvSpPr>
-          <p:cNvPr id="6" name="灯片编号占位符 5">
-            <a:extLst>
-              <a:ext uri="{FF2B5EF4-FFF2-40B4-BE49-F238E27FC236}">
-                <a16:creationId xmlns:a16="http://schemas.microsoft.com/office/drawing/2014/main" id="{321618AF-247D-42B9-B735-C71EE81FFE6F}"/>
-              </a:ext>
-            </a:extLst>
-          </p:cNvPr>
+          <p:cNvPr id="6" name="灯片编号占位符 5"/>
           <p:cNvSpPr>
             <a:spLocks noGrp="1"/>
           </p:cNvSpPr>
@@ -516,18 +447,12 @@
           <a:p>
             <a:fld id="{0A805578-4521-47B2-8AD5-D762FC1C9EF5}" type="slidenum">
               <a:rPr lang="en-US" smtClean="0"/>
-              <a:t>‹#›</a:t>
             </a:fld>
             <a:endParaRPr lang="en-US"/>
           </a:p>
         </p:txBody>
       </p:sp>
     </p:spTree>
-    <p:extLst>
-      <p:ext uri="{BB962C8B-B14F-4D97-AF65-F5344CB8AC3E}">
-        <p14:creationId xmlns:p14="http://schemas.microsoft.com/office/powerpoint/2010/main" val="576225249"/>
-      </p:ext>
-    </p:extLst>
   </p:cSld>
   <p:clrMapOvr>
     <a:masterClrMapping/>
@@ -554,13 +479,7 @@
       </p:grpSpPr>
       <p:sp>
         <p:nvSpPr>
-          <p:cNvPr id="2" name="竖排标题 1">
-            <a:extLst>
-              <a:ext uri="{FF2B5EF4-FFF2-40B4-BE49-F238E27FC236}">
-                <a16:creationId xmlns:a16="http://schemas.microsoft.com/office/drawing/2014/main" id="{4ADB3628-094A-4D62-BD21-AE0374DB3B0A}"/>
-              </a:ext>
-            </a:extLst>
-          </p:cNvPr>
+          <p:cNvPr id="2" name="竖排标题 1"/>
           <p:cNvSpPr>
             <a:spLocks noGrp="1"/>
           </p:cNvSpPr>
@@ -588,18 +507,12 @@
       </p:sp>
       <p:sp>
         <p:nvSpPr>
-          <p:cNvPr id="3" name="竖排文字占位符 2">
-            <a:extLst>
-              <a:ext uri="{FF2B5EF4-FFF2-40B4-BE49-F238E27FC236}">
-                <a16:creationId xmlns:a16="http://schemas.microsoft.com/office/drawing/2014/main" id="{47672F55-B87B-4E94-A629-709E2473A5E3}"/>
-              </a:ext>
-            </a:extLst>
-          </p:cNvPr>
-          <p:cNvSpPr>
-            <a:spLocks noGrp="1"/>
-          </p:cNvSpPr>
-          <p:nvPr>
-            <p:ph type="body" orient="vert" idx="1"/>
+          <p:cNvPr id="3" name="竖排文字占位符 2"/>
+          <p:cNvSpPr>
+            <a:spLocks noGrp="1"/>
+          </p:cNvSpPr>
+          <p:nvPr>
+            <p:ph type="body" orient="vert" idx="1" hasCustomPrompt="1"/>
           </p:nvPr>
         </p:nvSpPr>
         <p:spPr>
@@ -617,6 +530,7 @@
               <a:rPr lang="zh-CN" altLang="en-US"/>
               <a:t>编辑母版文本样式</a:t>
             </a:r>
+            <a:endParaRPr lang="zh-CN" altLang="en-US"/>
           </a:p>
           <a:p>
             <a:pPr lvl="1"/>
@@ -624,6 +538,7 @@
               <a:rPr lang="zh-CN" altLang="en-US"/>
               <a:t>第二级</a:t>
             </a:r>
+            <a:endParaRPr lang="zh-CN" altLang="en-US"/>
           </a:p>
           <a:p>
             <a:pPr lvl="2"/>
@@ -631,6 +546,7 @@
               <a:rPr lang="zh-CN" altLang="en-US"/>
               <a:t>第三级</a:t>
             </a:r>
+            <a:endParaRPr lang="zh-CN" altLang="en-US"/>
           </a:p>
           <a:p>
             <a:pPr lvl="3"/>
@@ -638,6 +554,7 @@
               <a:rPr lang="zh-CN" altLang="en-US"/>
               <a:t>第四级</a:t>
             </a:r>
+            <a:endParaRPr lang="zh-CN" altLang="en-US"/>
           </a:p>
           <a:p>
             <a:pPr lvl="4"/>
@@ -651,13 +568,7 @@
       </p:sp>
       <p:sp>
         <p:nvSpPr>
-          <p:cNvPr id="4" name="日期占位符 3">
-            <a:extLst>
-              <a:ext uri="{FF2B5EF4-FFF2-40B4-BE49-F238E27FC236}">
-                <a16:creationId xmlns:a16="http://schemas.microsoft.com/office/drawing/2014/main" id="{4A198C81-FF9F-4F0C-96AA-C3B2FF22E07D}"/>
-              </a:ext>
-            </a:extLst>
-          </p:cNvPr>
+          <p:cNvPr id="4" name="日期占位符 3"/>
           <p:cNvSpPr>
             <a:spLocks noGrp="1"/>
           </p:cNvSpPr>
@@ -672,7 +583,6 @@
           <a:p>
             <a:fld id="{EF4F237D-D39F-437D-B58E-A56F132280E9}" type="datetimeFigureOut">
               <a:rPr lang="en-US" smtClean="0"/>
-              <a:t>3/29/2024</a:t>
             </a:fld>
             <a:endParaRPr lang="en-US"/>
           </a:p>
@@ -680,13 +590,7 @@
       </p:sp>
       <p:sp>
         <p:nvSpPr>
-          <p:cNvPr id="5" name="页脚占位符 4">
-            <a:extLst>
-              <a:ext uri="{FF2B5EF4-FFF2-40B4-BE49-F238E27FC236}">
-                <a16:creationId xmlns:a16="http://schemas.microsoft.com/office/drawing/2014/main" id="{742CFD8D-2B21-4892-AB34-86FB05E4D883}"/>
-              </a:ext>
-            </a:extLst>
-          </p:cNvPr>
+          <p:cNvPr id="5" name="页脚占位符 4"/>
           <p:cNvSpPr>
             <a:spLocks noGrp="1"/>
           </p:cNvSpPr>
@@ -705,13 +609,7 @@
       </p:sp>
       <p:sp>
         <p:nvSpPr>
-          <p:cNvPr id="6" name="灯片编号占位符 5">
-            <a:extLst>
-              <a:ext uri="{FF2B5EF4-FFF2-40B4-BE49-F238E27FC236}">
-                <a16:creationId xmlns:a16="http://schemas.microsoft.com/office/drawing/2014/main" id="{AE87A5C7-2FC8-49CC-8675-A4CF44A26CDC}"/>
-              </a:ext>
-            </a:extLst>
-          </p:cNvPr>
+          <p:cNvPr id="6" name="灯片编号占位符 5"/>
           <p:cNvSpPr>
             <a:spLocks noGrp="1"/>
           </p:cNvSpPr>
@@ -726,18 +624,12 @@
           <a:p>
             <a:fld id="{0A805578-4521-47B2-8AD5-D762FC1C9EF5}" type="slidenum">
               <a:rPr lang="en-US" smtClean="0"/>
-              <a:t>‹#›</a:t>
             </a:fld>
             <a:endParaRPr lang="en-US"/>
           </a:p>
         </p:txBody>
       </p:sp>
     </p:spTree>
-    <p:extLst>
-      <p:ext uri="{BB962C8B-B14F-4D97-AF65-F5344CB8AC3E}">
-        <p14:creationId xmlns:p14="http://schemas.microsoft.com/office/powerpoint/2010/main" val="343327588"/>
-      </p:ext>
-    </p:extLst>
   </p:cSld>
   <p:clrMapOvr>
     <a:masterClrMapping/>
@@ -764,13 +656,7 @@
       </p:grpSpPr>
       <p:sp>
         <p:nvSpPr>
-          <p:cNvPr id="2" name="标题 1">
-            <a:extLst>
-              <a:ext uri="{FF2B5EF4-FFF2-40B4-BE49-F238E27FC236}">
-                <a16:creationId xmlns:a16="http://schemas.microsoft.com/office/drawing/2014/main" id="{F0A5F7E6-0332-4A1A-98BF-916FEAFE3496}"/>
-              </a:ext>
-            </a:extLst>
-          </p:cNvPr>
+          <p:cNvPr id="2" name="标题 1"/>
           <p:cNvSpPr>
             <a:spLocks noGrp="1"/>
           </p:cNvSpPr>
@@ -793,18 +679,12 @@
       </p:sp>
       <p:sp>
         <p:nvSpPr>
-          <p:cNvPr id="3" name="内容占位符 2">
-            <a:extLst>
-              <a:ext uri="{FF2B5EF4-FFF2-40B4-BE49-F238E27FC236}">
-                <a16:creationId xmlns:a16="http://schemas.microsoft.com/office/drawing/2014/main" id="{05ED9D52-EFD2-4BF5-8EF0-FB4EF2BD797B}"/>
-              </a:ext>
-            </a:extLst>
-          </p:cNvPr>
-          <p:cNvSpPr>
-            <a:spLocks noGrp="1"/>
-          </p:cNvSpPr>
-          <p:nvPr>
-            <p:ph idx="1"/>
+          <p:cNvPr id="3" name="内容占位符 2"/>
+          <p:cNvSpPr>
+            <a:spLocks noGrp="1"/>
+          </p:cNvSpPr>
+          <p:nvPr>
+            <p:ph idx="1" hasCustomPrompt="1"/>
           </p:nvPr>
         </p:nvSpPr>
         <p:spPr/>
@@ -817,6 +697,7 @@
               <a:rPr lang="zh-CN" altLang="en-US"/>
               <a:t>编辑母版文本样式</a:t>
             </a:r>
+            <a:endParaRPr lang="zh-CN" altLang="en-US"/>
           </a:p>
           <a:p>
             <a:pPr lvl="1"/>
@@ -824,6 +705,7 @@
               <a:rPr lang="zh-CN" altLang="en-US"/>
               <a:t>第二级</a:t>
             </a:r>
+            <a:endParaRPr lang="zh-CN" altLang="en-US"/>
           </a:p>
           <a:p>
             <a:pPr lvl="2"/>
@@ -831,6 +713,7 @@
               <a:rPr lang="zh-CN" altLang="en-US"/>
               <a:t>第三级</a:t>
             </a:r>
+            <a:endParaRPr lang="zh-CN" altLang="en-US"/>
           </a:p>
           <a:p>
             <a:pPr lvl="3"/>
@@ -838,6 +721,7 @@
               <a:rPr lang="zh-CN" altLang="en-US"/>
               <a:t>第四级</a:t>
             </a:r>
+            <a:endParaRPr lang="zh-CN" altLang="en-US"/>
           </a:p>
           <a:p>
             <a:pPr lvl="4"/>
@@ -851,13 +735,7 @@
       </p:sp>
       <p:sp>
         <p:nvSpPr>
-          <p:cNvPr id="4" name="日期占位符 3">
-            <a:extLst>
-              <a:ext uri="{FF2B5EF4-FFF2-40B4-BE49-F238E27FC236}">
-                <a16:creationId xmlns:a16="http://schemas.microsoft.com/office/drawing/2014/main" id="{23840A84-77C2-4322-93C5-069FBAFA1F89}"/>
-              </a:ext>
-            </a:extLst>
-          </p:cNvPr>
+          <p:cNvPr id="4" name="日期占位符 3"/>
           <p:cNvSpPr>
             <a:spLocks noGrp="1"/>
           </p:cNvSpPr>
@@ -872,7 +750,6 @@
           <a:p>
             <a:fld id="{EF4F237D-D39F-437D-B58E-A56F132280E9}" type="datetimeFigureOut">
               <a:rPr lang="en-US" smtClean="0"/>
-              <a:t>3/29/2024</a:t>
             </a:fld>
             <a:endParaRPr lang="en-US"/>
           </a:p>
@@ -880,13 +757,7 @@
       </p:sp>
       <p:sp>
         <p:nvSpPr>
-          <p:cNvPr id="5" name="页脚占位符 4">
-            <a:extLst>
-              <a:ext uri="{FF2B5EF4-FFF2-40B4-BE49-F238E27FC236}">
-                <a16:creationId xmlns:a16="http://schemas.microsoft.com/office/drawing/2014/main" id="{A309C220-6DA9-487A-8263-BE5CE6D99127}"/>
-              </a:ext>
-            </a:extLst>
-          </p:cNvPr>
+          <p:cNvPr id="5" name="页脚占位符 4"/>
           <p:cNvSpPr>
             <a:spLocks noGrp="1"/>
           </p:cNvSpPr>
@@ -905,13 +776,7 @@
       </p:sp>
       <p:sp>
         <p:nvSpPr>
-          <p:cNvPr id="6" name="灯片编号占位符 5">
-            <a:extLst>
-              <a:ext uri="{FF2B5EF4-FFF2-40B4-BE49-F238E27FC236}">
-                <a16:creationId xmlns:a16="http://schemas.microsoft.com/office/drawing/2014/main" id="{7AEFA2ED-F149-4641-B9D0-3BB8FCEE3317}"/>
-              </a:ext>
-            </a:extLst>
-          </p:cNvPr>
+          <p:cNvPr id="6" name="灯片编号占位符 5"/>
           <p:cNvSpPr>
             <a:spLocks noGrp="1"/>
           </p:cNvSpPr>
@@ -926,18 +791,12 @@
           <a:p>
             <a:fld id="{0A805578-4521-47B2-8AD5-D762FC1C9EF5}" type="slidenum">
               <a:rPr lang="en-US" smtClean="0"/>
-              <a:t>‹#›</a:t>
             </a:fld>
             <a:endParaRPr lang="en-US"/>
           </a:p>
         </p:txBody>
       </p:sp>
     </p:spTree>
-    <p:extLst>
-      <p:ext uri="{BB962C8B-B14F-4D97-AF65-F5344CB8AC3E}">
-        <p14:creationId xmlns:p14="http://schemas.microsoft.com/office/powerpoint/2010/main" val="2457476111"/>
-      </p:ext>
-    </p:extLst>
   </p:cSld>
   <p:clrMapOvr>
     <a:masterClrMapping/>
@@ -964,13 +823,7 @@
       </p:grpSpPr>
       <p:sp>
         <p:nvSpPr>
-          <p:cNvPr id="2" name="标题 1">
-            <a:extLst>
-              <a:ext uri="{FF2B5EF4-FFF2-40B4-BE49-F238E27FC236}">
-                <a16:creationId xmlns:a16="http://schemas.microsoft.com/office/drawing/2014/main" id="{CC972618-0B58-4E6F-8B2E-FE909570F05F}"/>
-              </a:ext>
-            </a:extLst>
-          </p:cNvPr>
+          <p:cNvPr id="2" name="标题 1"/>
           <p:cNvSpPr>
             <a:spLocks noGrp="1"/>
           </p:cNvSpPr>
@@ -1002,18 +855,12 @@
       </p:sp>
       <p:sp>
         <p:nvSpPr>
-          <p:cNvPr id="3" name="文本占位符 2">
-            <a:extLst>
-              <a:ext uri="{FF2B5EF4-FFF2-40B4-BE49-F238E27FC236}">
-                <a16:creationId xmlns:a16="http://schemas.microsoft.com/office/drawing/2014/main" id="{98F65DB5-70D7-457A-A5F3-DFAF868BC9B6}"/>
-              </a:ext>
-            </a:extLst>
-          </p:cNvPr>
-          <p:cNvSpPr>
-            <a:spLocks noGrp="1"/>
-          </p:cNvSpPr>
-          <p:nvPr>
-            <p:ph type="body" idx="1"/>
+          <p:cNvPr id="3" name="文本占位符 2"/>
+          <p:cNvSpPr>
+            <a:spLocks noGrp="1"/>
+          </p:cNvSpPr>
+          <p:nvPr>
+            <p:ph type="body" idx="1" hasCustomPrompt="1"/>
           </p:nvPr>
         </p:nvSpPr>
         <p:spPr>
@@ -1122,18 +969,13 @@
               <a:rPr lang="zh-CN" altLang="en-US"/>
               <a:t>编辑母版文本样式</a:t>
             </a:r>
-          </a:p>
-        </p:txBody>
-      </p:sp>
-      <p:sp>
-        <p:nvSpPr>
-          <p:cNvPr id="4" name="日期占位符 3">
-            <a:extLst>
-              <a:ext uri="{FF2B5EF4-FFF2-40B4-BE49-F238E27FC236}">
-                <a16:creationId xmlns:a16="http://schemas.microsoft.com/office/drawing/2014/main" id="{0D6499EB-0E48-4D7C-8711-80CCBB44A923}"/>
-              </a:ext>
-            </a:extLst>
-          </p:cNvPr>
+            <a:endParaRPr lang="zh-CN" altLang="en-US"/>
+          </a:p>
+        </p:txBody>
+      </p:sp>
+      <p:sp>
+        <p:nvSpPr>
+          <p:cNvPr id="4" name="日期占位符 3"/>
           <p:cNvSpPr>
             <a:spLocks noGrp="1"/>
           </p:cNvSpPr>
@@ -1148,7 +990,6 @@
           <a:p>
             <a:fld id="{EF4F237D-D39F-437D-B58E-A56F132280E9}" type="datetimeFigureOut">
               <a:rPr lang="en-US" smtClean="0"/>
-              <a:t>3/29/2024</a:t>
             </a:fld>
             <a:endParaRPr lang="en-US"/>
           </a:p>
@@ -1156,13 +997,7 @@
       </p:sp>
       <p:sp>
         <p:nvSpPr>
-          <p:cNvPr id="5" name="页脚占位符 4">
-            <a:extLst>
-              <a:ext uri="{FF2B5EF4-FFF2-40B4-BE49-F238E27FC236}">
-                <a16:creationId xmlns:a16="http://schemas.microsoft.com/office/drawing/2014/main" id="{80F395C8-E3D3-4D37-ACF8-FA665BA2DF00}"/>
-              </a:ext>
-            </a:extLst>
-          </p:cNvPr>
+          <p:cNvPr id="5" name="页脚占位符 4"/>
           <p:cNvSpPr>
             <a:spLocks noGrp="1"/>
           </p:cNvSpPr>
@@ -1181,13 +1016,7 @@
       </p:sp>
       <p:sp>
         <p:nvSpPr>
-          <p:cNvPr id="6" name="灯片编号占位符 5">
-            <a:extLst>
-              <a:ext uri="{FF2B5EF4-FFF2-40B4-BE49-F238E27FC236}">
-                <a16:creationId xmlns:a16="http://schemas.microsoft.com/office/drawing/2014/main" id="{7C415F24-81FD-46BE-B5F2-C4B61C828CDC}"/>
-              </a:ext>
-            </a:extLst>
-          </p:cNvPr>
+          <p:cNvPr id="6" name="灯片编号占位符 5"/>
           <p:cNvSpPr>
             <a:spLocks noGrp="1"/>
           </p:cNvSpPr>
@@ -1202,18 +1031,12 @@
           <a:p>
             <a:fld id="{0A805578-4521-47B2-8AD5-D762FC1C9EF5}" type="slidenum">
               <a:rPr lang="en-US" smtClean="0"/>
-              <a:t>‹#›</a:t>
             </a:fld>
             <a:endParaRPr lang="en-US"/>
           </a:p>
         </p:txBody>
       </p:sp>
     </p:spTree>
-    <p:extLst>
-      <p:ext uri="{BB962C8B-B14F-4D97-AF65-F5344CB8AC3E}">
-        <p14:creationId xmlns:p14="http://schemas.microsoft.com/office/powerpoint/2010/main" val="3233880568"/>
-      </p:ext>
-    </p:extLst>
   </p:cSld>
   <p:clrMapOvr>
     <a:masterClrMapping/>
@@ -1240,13 +1063,7 @@
       </p:grpSpPr>
       <p:sp>
         <p:nvSpPr>
-          <p:cNvPr id="2" name="标题 1">
-            <a:extLst>
-              <a:ext uri="{FF2B5EF4-FFF2-40B4-BE49-F238E27FC236}">
-                <a16:creationId xmlns:a16="http://schemas.microsoft.com/office/drawing/2014/main" id="{CDA3E0B3-AD9A-403E-AE21-083DDFFE18F8}"/>
-              </a:ext>
-            </a:extLst>
-          </p:cNvPr>
+          <p:cNvPr id="2" name="标题 1"/>
           <p:cNvSpPr>
             <a:spLocks noGrp="1"/>
           </p:cNvSpPr>
@@ -1269,18 +1086,12 @@
       </p:sp>
       <p:sp>
         <p:nvSpPr>
-          <p:cNvPr id="3" name="内容占位符 2">
-            <a:extLst>
-              <a:ext uri="{FF2B5EF4-FFF2-40B4-BE49-F238E27FC236}">
-                <a16:creationId xmlns:a16="http://schemas.microsoft.com/office/drawing/2014/main" id="{59607C80-1BD1-432C-972F-A1BAB15276A1}"/>
-              </a:ext>
-            </a:extLst>
-          </p:cNvPr>
-          <p:cNvSpPr>
-            <a:spLocks noGrp="1"/>
-          </p:cNvSpPr>
-          <p:nvPr>
-            <p:ph sz="half" idx="1"/>
+          <p:cNvPr id="3" name="内容占位符 2"/>
+          <p:cNvSpPr>
+            <a:spLocks noGrp="1"/>
+          </p:cNvSpPr>
+          <p:nvPr>
+            <p:ph sz="half" idx="1" hasCustomPrompt="1"/>
           </p:nvPr>
         </p:nvSpPr>
         <p:spPr>
@@ -1298,6 +1109,7 @@
               <a:rPr lang="zh-CN" altLang="en-US"/>
               <a:t>编辑母版文本样式</a:t>
             </a:r>
+            <a:endParaRPr lang="zh-CN" altLang="en-US"/>
           </a:p>
           <a:p>
             <a:pPr lvl="1"/>
@@ -1305,6 +1117,7 @@
               <a:rPr lang="zh-CN" altLang="en-US"/>
               <a:t>第二级</a:t>
             </a:r>
+            <a:endParaRPr lang="zh-CN" altLang="en-US"/>
           </a:p>
           <a:p>
             <a:pPr lvl="2"/>
@@ -1312,6 +1125,7 @@
               <a:rPr lang="zh-CN" altLang="en-US"/>
               <a:t>第三级</a:t>
             </a:r>
+            <a:endParaRPr lang="zh-CN" altLang="en-US"/>
           </a:p>
           <a:p>
             <a:pPr lvl="3"/>
@@ -1319,6 +1133,7 @@
               <a:rPr lang="zh-CN" altLang="en-US"/>
               <a:t>第四级</a:t>
             </a:r>
+            <a:endParaRPr lang="zh-CN" altLang="en-US"/>
           </a:p>
           <a:p>
             <a:pPr lvl="4"/>
@@ -1332,18 +1147,12 @@
       </p:sp>
       <p:sp>
         <p:nvSpPr>
-          <p:cNvPr id="4" name="内容占位符 3">
-            <a:extLst>
-              <a:ext uri="{FF2B5EF4-FFF2-40B4-BE49-F238E27FC236}">
-                <a16:creationId xmlns:a16="http://schemas.microsoft.com/office/drawing/2014/main" id="{BA5C5A0F-DC4B-44C9-A5E0-719746C3CDFE}"/>
-              </a:ext>
-            </a:extLst>
-          </p:cNvPr>
-          <p:cNvSpPr>
-            <a:spLocks noGrp="1"/>
-          </p:cNvSpPr>
-          <p:nvPr>
-            <p:ph sz="half" idx="2"/>
+          <p:cNvPr id="4" name="内容占位符 3"/>
+          <p:cNvSpPr>
+            <a:spLocks noGrp="1"/>
+          </p:cNvSpPr>
+          <p:nvPr>
+            <p:ph sz="half" idx="2" hasCustomPrompt="1"/>
           </p:nvPr>
         </p:nvSpPr>
         <p:spPr>
@@ -1361,6 +1170,7 @@
               <a:rPr lang="zh-CN" altLang="en-US"/>
               <a:t>编辑母版文本样式</a:t>
             </a:r>
+            <a:endParaRPr lang="zh-CN" altLang="en-US"/>
           </a:p>
           <a:p>
             <a:pPr lvl="1"/>
@@ -1368,6 +1178,7 @@
               <a:rPr lang="zh-CN" altLang="en-US"/>
               <a:t>第二级</a:t>
             </a:r>
+            <a:endParaRPr lang="zh-CN" altLang="en-US"/>
           </a:p>
           <a:p>
             <a:pPr lvl="2"/>
@@ -1375,6 +1186,7 @@
               <a:rPr lang="zh-CN" altLang="en-US"/>
               <a:t>第三级</a:t>
             </a:r>
+            <a:endParaRPr lang="zh-CN" altLang="en-US"/>
           </a:p>
           <a:p>
             <a:pPr lvl="3"/>
@@ -1382,6 +1194,7 @@
               <a:rPr lang="zh-CN" altLang="en-US"/>
               <a:t>第四级</a:t>
             </a:r>
+            <a:endParaRPr lang="zh-CN" altLang="en-US"/>
           </a:p>
           <a:p>
             <a:pPr lvl="4"/>
@@ -1395,13 +1208,7 @@
       </p:sp>
       <p:sp>
         <p:nvSpPr>
-          <p:cNvPr id="5" name="日期占位符 4">
-            <a:extLst>
-              <a:ext uri="{FF2B5EF4-FFF2-40B4-BE49-F238E27FC236}">
-                <a16:creationId xmlns:a16="http://schemas.microsoft.com/office/drawing/2014/main" id="{F4FB864E-EE78-4A5B-A6F1-0758E6BBC6B2}"/>
-              </a:ext>
-            </a:extLst>
-          </p:cNvPr>
+          <p:cNvPr id="5" name="日期占位符 4"/>
           <p:cNvSpPr>
             <a:spLocks noGrp="1"/>
           </p:cNvSpPr>
@@ -1416,7 +1223,6 @@
           <a:p>
             <a:fld id="{EF4F237D-D39F-437D-B58E-A56F132280E9}" type="datetimeFigureOut">
               <a:rPr lang="en-US" smtClean="0"/>
-              <a:t>3/29/2024</a:t>
             </a:fld>
             <a:endParaRPr lang="en-US"/>
           </a:p>
@@ -1424,13 +1230,7 @@
       </p:sp>
       <p:sp>
         <p:nvSpPr>
-          <p:cNvPr id="6" name="页脚占位符 5">
-            <a:extLst>
-              <a:ext uri="{FF2B5EF4-FFF2-40B4-BE49-F238E27FC236}">
-                <a16:creationId xmlns:a16="http://schemas.microsoft.com/office/drawing/2014/main" id="{884D26A3-E09E-43D2-93FD-D12671EBFF1F}"/>
-              </a:ext>
-            </a:extLst>
-          </p:cNvPr>
+          <p:cNvPr id="6" name="页脚占位符 5"/>
           <p:cNvSpPr>
             <a:spLocks noGrp="1"/>
           </p:cNvSpPr>
@@ -1449,13 +1249,7 @@
       </p:sp>
       <p:sp>
         <p:nvSpPr>
-          <p:cNvPr id="7" name="灯片编号占位符 6">
-            <a:extLst>
-              <a:ext uri="{FF2B5EF4-FFF2-40B4-BE49-F238E27FC236}">
-                <a16:creationId xmlns:a16="http://schemas.microsoft.com/office/drawing/2014/main" id="{3A40409B-2AE1-4DA6-A33A-AFAA7D48C7E0}"/>
-              </a:ext>
-            </a:extLst>
-          </p:cNvPr>
+          <p:cNvPr id="7" name="灯片编号占位符 6"/>
           <p:cNvSpPr>
             <a:spLocks noGrp="1"/>
           </p:cNvSpPr>
@@ -1470,18 +1264,12 @@
           <a:p>
             <a:fld id="{0A805578-4521-47B2-8AD5-D762FC1C9EF5}" type="slidenum">
               <a:rPr lang="en-US" smtClean="0"/>
-              <a:t>‹#›</a:t>
             </a:fld>
             <a:endParaRPr lang="en-US"/>
           </a:p>
         </p:txBody>
       </p:sp>
     </p:spTree>
-    <p:extLst>
-      <p:ext uri="{BB962C8B-B14F-4D97-AF65-F5344CB8AC3E}">
-        <p14:creationId xmlns:p14="http://schemas.microsoft.com/office/powerpoint/2010/main" val="290330990"/>
-      </p:ext>
-    </p:extLst>
   </p:cSld>
   <p:clrMapOvr>
     <a:masterClrMapping/>
@@ -1508,13 +1296,7 @@
       </p:grpSpPr>
       <p:sp>
         <p:nvSpPr>
-          <p:cNvPr id="2" name="标题 1">
-            <a:extLst>
-              <a:ext uri="{FF2B5EF4-FFF2-40B4-BE49-F238E27FC236}">
-                <a16:creationId xmlns:a16="http://schemas.microsoft.com/office/drawing/2014/main" id="{CFDDED57-900A-4F08-90D4-C853BA109830}"/>
-              </a:ext>
-            </a:extLst>
-          </p:cNvPr>
+          <p:cNvPr id="2" name="标题 1"/>
           <p:cNvSpPr>
             <a:spLocks noGrp="1"/>
           </p:cNvSpPr>
@@ -1542,18 +1324,12 @@
       </p:sp>
       <p:sp>
         <p:nvSpPr>
-          <p:cNvPr id="3" name="文本占位符 2">
-            <a:extLst>
-              <a:ext uri="{FF2B5EF4-FFF2-40B4-BE49-F238E27FC236}">
-                <a16:creationId xmlns:a16="http://schemas.microsoft.com/office/drawing/2014/main" id="{7CC0107A-E06C-4C4D-936F-690C937BB620}"/>
-              </a:ext>
-            </a:extLst>
-          </p:cNvPr>
-          <p:cNvSpPr>
-            <a:spLocks noGrp="1"/>
-          </p:cNvSpPr>
-          <p:nvPr>
-            <p:ph type="body" idx="1"/>
+          <p:cNvPr id="3" name="文本占位符 2"/>
+          <p:cNvSpPr>
+            <a:spLocks noGrp="1"/>
+          </p:cNvSpPr>
+          <p:nvPr>
+            <p:ph type="body" idx="1" hasCustomPrompt="1"/>
           </p:nvPr>
         </p:nvSpPr>
         <p:spPr>
@@ -1608,23 +1384,18 @@
               <a:rPr lang="zh-CN" altLang="en-US"/>
               <a:t>编辑母版文本样式</a:t>
             </a:r>
-          </a:p>
-        </p:txBody>
-      </p:sp>
-      <p:sp>
-        <p:nvSpPr>
-          <p:cNvPr id="4" name="内容占位符 3">
-            <a:extLst>
-              <a:ext uri="{FF2B5EF4-FFF2-40B4-BE49-F238E27FC236}">
-                <a16:creationId xmlns:a16="http://schemas.microsoft.com/office/drawing/2014/main" id="{F085C364-48DA-412C-9100-08D5C8D177DD}"/>
-              </a:ext>
-            </a:extLst>
-          </p:cNvPr>
-          <p:cNvSpPr>
-            <a:spLocks noGrp="1"/>
-          </p:cNvSpPr>
-          <p:nvPr>
-            <p:ph sz="half" idx="2"/>
+            <a:endParaRPr lang="zh-CN" altLang="en-US"/>
+          </a:p>
+        </p:txBody>
+      </p:sp>
+      <p:sp>
+        <p:nvSpPr>
+          <p:cNvPr id="4" name="内容占位符 3"/>
+          <p:cNvSpPr>
+            <a:spLocks noGrp="1"/>
+          </p:cNvSpPr>
+          <p:nvPr>
+            <p:ph sz="half" idx="2" hasCustomPrompt="1"/>
           </p:nvPr>
         </p:nvSpPr>
         <p:spPr>
@@ -1642,6 +1413,7 @@
               <a:rPr lang="zh-CN" altLang="en-US"/>
               <a:t>编辑母版文本样式</a:t>
             </a:r>
+            <a:endParaRPr lang="zh-CN" altLang="en-US"/>
           </a:p>
           <a:p>
             <a:pPr lvl="1"/>
@@ -1649,6 +1421,7 @@
               <a:rPr lang="zh-CN" altLang="en-US"/>
               <a:t>第二级</a:t>
             </a:r>
+            <a:endParaRPr lang="zh-CN" altLang="en-US"/>
           </a:p>
           <a:p>
             <a:pPr lvl="2"/>
@@ -1656,6 +1429,7 @@
               <a:rPr lang="zh-CN" altLang="en-US"/>
               <a:t>第三级</a:t>
             </a:r>
+            <a:endParaRPr lang="zh-CN" altLang="en-US"/>
           </a:p>
           <a:p>
             <a:pPr lvl="3"/>
@@ -1663,6 +1437,7 @@
               <a:rPr lang="zh-CN" altLang="en-US"/>
               <a:t>第四级</a:t>
             </a:r>
+            <a:endParaRPr lang="zh-CN" altLang="en-US"/>
           </a:p>
           <a:p>
             <a:pPr lvl="4"/>
@@ -1676,18 +1451,12 @@
       </p:sp>
       <p:sp>
         <p:nvSpPr>
-          <p:cNvPr id="5" name="文本占位符 4">
-            <a:extLst>
-              <a:ext uri="{FF2B5EF4-FFF2-40B4-BE49-F238E27FC236}">
-                <a16:creationId xmlns:a16="http://schemas.microsoft.com/office/drawing/2014/main" id="{A76E006D-6273-40ED-972A-D5FE7955FCED}"/>
-              </a:ext>
-            </a:extLst>
-          </p:cNvPr>
-          <p:cNvSpPr>
-            <a:spLocks noGrp="1"/>
-          </p:cNvSpPr>
-          <p:nvPr>
-            <p:ph type="body" sz="quarter" idx="3"/>
+          <p:cNvPr id="5" name="文本占位符 4"/>
+          <p:cNvSpPr>
+            <a:spLocks noGrp="1"/>
+          </p:cNvSpPr>
+          <p:nvPr>
+            <p:ph type="body" sz="quarter" idx="3" hasCustomPrompt="1"/>
           </p:nvPr>
         </p:nvSpPr>
         <p:spPr>
@@ -1742,23 +1511,18 @@
               <a:rPr lang="zh-CN" altLang="en-US"/>
               <a:t>编辑母版文本样式</a:t>
             </a:r>
-          </a:p>
-        </p:txBody>
-      </p:sp>
-      <p:sp>
-        <p:nvSpPr>
-          <p:cNvPr id="6" name="内容占位符 5">
-            <a:extLst>
-              <a:ext uri="{FF2B5EF4-FFF2-40B4-BE49-F238E27FC236}">
-                <a16:creationId xmlns:a16="http://schemas.microsoft.com/office/drawing/2014/main" id="{7E625ABD-1326-4E04-8A4B-96BCC9CB029E}"/>
-              </a:ext>
-            </a:extLst>
-          </p:cNvPr>
-          <p:cNvSpPr>
-            <a:spLocks noGrp="1"/>
-          </p:cNvSpPr>
-          <p:nvPr>
-            <p:ph sz="quarter" idx="4"/>
+            <a:endParaRPr lang="zh-CN" altLang="en-US"/>
+          </a:p>
+        </p:txBody>
+      </p:sp>
+      <p:sp>
+        <p:nvSpPr>
+          <p:cNvPr id="6" name="内容占位符 5"/>
+          <p:cNvSpPr>
+            <a:spLocks noGrp="1"/>
+          </p:cNvSpPr>
+          <p:nvPr>
+            <p:ph sz="quarter" idx="4" hasCustomPrompt="1"/>
           </p:nvPr>
         </p:nvSpPr>
         <p:spPr>
@@ -1776,6 +1540,7 @@
               <a:rPr lang="zh-CN" altLang="en-US"/>
               <a:t>编辑母版文本样式</a:t>
             </a:r>
+            <a:endParaRPr lang="zh-CN" altLang="en-US"/>
           </a:p>
           <a:p>
             <a:pPr lvl="1"/>
@@ -1783,6 +1548,7 @@
               <a:rPr lang="zh-CN" altLang="en-US"/>
               <a:t>第二级</a:t>
             </a:r>
+            <a:endParaRPr lang="zh-CN" altLang="en-US"/>
           </a:p>
           <a:p>
             <a:pPr lvl="2"/>
@@ -1790,6 +1556,7 @@
               <a:rPr lang="zh-CN" altLang="en-US"/>
               <a:t>第三级</a:t>
             </a:r>
+            <a:endParaRPr lang="zh-CN" altLang="en-US"/>
           </a:p>
           <a:p>
             <a:pPr lvl="3"/>
@@ -1797,6 +1564,7 @@
               <a:rPr lang="zh-CN" altLang="en-US"/>
               <a:t>第四级</a:t>
             </a:r>
+            <a:endParaRPr lang="zh-CN" altLang="en-US"/>
           </a:p>
           <a:p>
             <a:pPr lvl="4"/>
@@ -1810,13 +1578,7 @@
       </p:sp>
       <p:sp>
         <p:nvSpPr>
-          <p:cNvPr id="7" name="日期占位符 6">
-            <a:extLst>
-              <a:ext uri="{FF2B5EF4-FFF2-40B4-BE49-F238E27FC236}">
-                <a16:creationId xmlns:a16="http://schemas.microsoft.com/office/drawing/2014/main" id="{2571DFF6-52BE-42A3-B118-95DA2ECCA82C}"/>
-              </a:ext>
-            </a:extLst>
-          </p:cNvPr>
+          <p:cNvPr id="7" name="日期占位符 6"/>
           <p:cNvSpPr>
             <a:spLocks noGrp="1"/>
           </p:cNvSpPr>
@@ -1831,7 +1593,6 @@
           <a:p>
             <a:fld id="{EF4F237D-D39F-437D-B58E-A56F132280E9}" type="datetimeFigureOut">
               <a:rPr lang="en-US" smtClean="0"/>
-              <a:t>3/29/2024</a:t>
             </a:fld>
             <a:endParaRPr lang="en-US"/>
           </a:p>
@@ -1839,13 +1600,7 @@
       </p:sp>
       <p:sp>
         <p:nvSpPr>
-          <p:cNvPr id="8" name="页脚占位符 7">
-            <a:extLst>
-              <a:ext uri="{FF2B5EF4-FFF2-40B4-BE49-F238E27FC236}">
-                <a16:creationId xmlns:a16="http://schemas.microsoft.com/office/drawing/2014/main" id="{418D8BF9-40D8-4F88-8716-3E7ED4FDEBFC}"/>
-              </a:ext>
-            </a:extLst>
-          </p:cNvPr>
+          <p:cNvPr id="8" name="页脚占位符 7"/>
           <p:cNvSpPr>
             <a:spLocks noGrp="1"/>
           </p:cNvSpPr>
@@ -1864,13 +1619,7 @@
       </p:sp>
       <p:sp>
         <p:nvSpPr>
-          <p:cNvPr id="9" name="灯片编号占位符 8">
-            <a:extLst>
-              <a:ext uri="{FF2B5EF4-FFF2-40B4-BE49-F238E27FC236}">
-                <a16:creationId xmlns:a16="http://schemas.microsoft.com/office/drawing/2014/main" id="{3B5DDD18-C642-452D-82DF-6BA325F268F8}"/>
-              </a:ext>
-            </a:extLst>
-          </p:cNvPr>
+          <p:cNvPr id="9" name="灯片编号占位符 8"/>
           <p:cNvSpPr>
             <a:spLocks noGrp="1"/>
           </p:cNvSpPr>
@@ -1885,18 +1634,12 @@
           <a:p>
             <a:fld id="{0A805578-4521-47B2-8AD5-D762FC1C9EF5}" type="slidenum">
               <a:rPr lang="en-US" smtClean="0"/>
-              <a:t>‹#›</a:t>
             </a:fld>
             <a:endParaRPr lang="en-US"/>
           </a:p>
         </p:txBody>
       </p:sp>
     </p:spTree>
-    <p:extLst>
-      <p:ext uri="{BB962C8B-B14F-4D97-AF65-F5344CB8AC3E}">
-        <p14:creationId xmlns:p14="http://schemas.microsoft.com/office/powerpoint/2010/main" val="3721706243"/>
-      </p:ext>
-    </p:extLst>
   </p:cSld>
   <p:clrMapOvr>
     <a:masterClrMapping/>
@@ -1923,13 +1666,7 @@
       </p:grpSpPr>
       <p:sp>
         <p:nvSpPr>
-          <p:cNvPr id="2" name="标题 1">
-            <a:extLst>
-              <a:ext uri="{FF2B5EF4-FFF2-40B4-BE49-F238E27FC236}">
-                <a16:creationId xmlns:a16="http://schemas.microsoft.com/office/drawing/2014/main" id="{BC43A3E8-FBFF-43AC-9AAE-81B5164E6CE0}"/>
-              </a:ext>
-            </a:extLst>
-          </p:cNvPr>
+          <p:cNvPr id="2" name="标题 1"/>
           <p:cNvSpPr>
             <a:spLocks noGrp="1"/>
           </p:cNvSpPr>
@@ -1952,13 +1689,7 @@
       </p:sp>
       <p:sp>
         <p:nvSpPr>
-          <p:cNvPr id="3" name="日期占位符 2">
-            <a:extLst>
-              <a:ext uri="{FF2B5EF4-FFF2-40B4-BE49-F238E27FC236}">
-                <a16:creationId xmlns:a16="http://schemas.microsoft.com/office/drawing/2014/main" id="{9C2744C0-E269-46FF-A4F9-9DEC3FB14C77}"/>
-              </a:ext>
-            </a:extLst>
-          </p:cNvPr>
+          <p:cNvPr id="3" name="日期占位符 2"/>
           <p:cNvSpPr>
             <a:spLocks noGrp="1"/>
           </p:cNvSpPr>
@@ -1973,7 +1704,6 @@
           <a:p>
             <a:fld id="{EF4F237D-D39F-437D-B58E-A56F132280E9}" type="datetimeFigureOut">
               <a:rPr lang="en-US" smtClean="0"/>
-              <a:t>3/29/2024</a:t>
             </a:fld>
             <a:endParaRPr lang="en-US"/>
           </a:p>
@@ -1981,13 +1711,7 @@
       </p:sp>
       <p:sp>
         <p:nvSpPr>
-          <p:cNvPr id="4" name="页脚占位符 3">
-            <a:extLst>
-              <a:ext uri="{FF2B5EF4-FFF2-40B4-BE49-F238E27FC236}">
-                <a16:creationId xmlns:a16="http://schemas.microsoft.com/office/drawing/2014/main" id="{06D77A7D-1BBA-4E50-8D00-BABF37289940}"/>
-              </a:ext>
-            </a:extLst>
-          </p:cNvPr>
+          <p:cNvPr id="4" name="页脚占位符 3"/>
           <p:cNvSpPr>
             <a:spLocks noGrp="1"/>
           </p:cNvSpPr>
@@ -2006,13 +1730,7 @@
       </p:sp>
       <p:sp>
         <p:nvSpPr>
-          <p:cNvPr id="5" name="灯片编号占位符 4">
-            <a:extLst>
-              <a:ext uri="{FF2B5EF4-FFF2-40B4-BE49-F238E27FC236}">
-                <a16:creationId xmlns:a16="http://schemas.microsoft.com/office/drawing/2014/main" id="{E39DAAAB-CE4D-48DE-98FC-FE381FCBA870}"/>
-              </a:ext>
-            </a:extLst>
-          </p:cNvPr>
+          <p:cNvPr id="5" name="灯片编号占位符 4"/>
           <p:cNvSpPr>
             <a:spLocks noGrp="1"/>
           </p:cNvSpPr>
@@ -2027,18 +1745,12 @@
           <a:p>
             <a:fld id="{0A805578-4521-47B2-8AD5-D762FC1C9EF5}" type="slidenum">
               <a:rPr lang="en-US" smtClean="0"/>
-              <a:t>‹#›</a:t>
             </a:fld>
             <a:endParaRPr lang="en-US"/>
           </a:p>
         </p:txBody>
       </p:sp>
     </p:spTree>
-    <p:extLst>
-      <p:ext uri="{BB962C8B-B14F-4D97-AF65-F5344CB8AC3E}">
-        <p14:creationId xmlns:p14="http://schemas.microsoft.com/office/powerpoint/2010/main" val="3963734009"/>
-      </p:ext>
-    </p:extLst>
   </p:cSld>
   <p:clrMapOvr>
     <a:masterClrMapping/>
@@ -2065,13 +1777,7 @@
       </p:grpSpPr>
       <p:sp>
         <p:nvSpPr>
-          <p:cNvPr id="2" name="日期占位符 1">
-            <a:extLst>
-              <a:ext uri="{FF2B5EF4-FFF2-40B4-BE49-F238E27FC236}">
-                <a16:creationId xmlns:a16="http://schemas.microsoft.com/office/drawing/2014/main" id="{C116CCE1-9A51-48D2-9A18-FF124BA479A1}"/>
-              </a:ext>
-            </a:extLst>
-          </p:cNvPr>
+          <p:cNvPr id="2" name="日期占位符 1"/>
           <p:cNvSpPr>
             <a:spLocks noGrp="1"/>
           </p:cNvSpPr>
@@ -2086,7 +1792,6 @@
           <a:p>
             <a:fld id="{EF4F237D-D39F-437D-B58E-A56F132280E9}" type="datetimeFigureOut">
               <a:rPr lang="en-US" smtClean="0"/>
-              <a:t>3/29/2024</a:t>
             </a:fld>
             <a:endParaRPr lang="en-US"/>
           </a:p>
@@ -2094,13 +1799,7 @@
       </p:sp>
       <p:sp>
         <p:nvSpPr>
-          <p:cNvPr id="3" name="页脚占位符 2">
-            <a:extLst>
-              <a:ext uri="{FF2B5EF4-FFF2-40B4-BE49-F238E27FC236}">
-                <a16:creationId xmlns:a16="http://schemas.microsoft.com/office/drawing/2014/main" id="{0B43E831-E93F-469C-ACCA-ECF87D966BC7}"/>
-              </a:ext>
-            </a:extLst>
-          </p:cNvPr>
+          <p:cNvPr id="3" name="页脚占位符 2"/>
           <p:cNvSpPr>
             <a:spLocks noGrp="1"/>
           </p:cNvSpPr>
@@ -2119,13 +1818,7 @@
       </p:sp>
       <p:sp>
         <p:nvSpPr>
-          <p:cNvPr id="4" name="灯片编号占位符 3">
-            <a:extLst>
-              <a:ext uri="{FF2B5EF4-FFF2-40B4-BE49-F238E27FC236}">
-                <a16:creationId xmlns:a16="http://schemas.microsoft.com/office/drawing/2014/main" id="{0713A074-14DB-47C9-9C80-AF3B9F9757CE}"/>
-              </a:ext>
-            </a:extLst>
-          </p:cNvPr>
+          <p:cNvPr id="4" name="灯片编号占位符 3"/>
           <p:cNvSpPr>
             <a:spLocks noGrp="1"/>
           </p:cNvSpPr>
@@ -2140,18 +1833,12 @@
           <a:p>
             <a:fld id="{0A805578-4521-47B2-8AD5-D762FC1C9EF5}" type="slidenum">
               <a:rPr lang="en-US" smtClean="0"/>
-              <a:t>‹#›</a:t>
             </a:fld>
             <a:endParaRPr lang="en-US"/>
           </a:p>
         </p:txBody>
       </p:sp>
     </p:spTree>
-    <p:extLst>
-      <p:ext uri="{BB962C8B-B14F-4D97-AF65-F5344CB8AC3E}">
-        <p14:creationId xmlns:p14="http://schemas.microsoft.com/office/powerpoint/2010/main" val="3403470101"/>
-      </p:ext>
-    </p:extLst>
   </p:cSld>
   <p:clrMapOvr>
     <a:masterClrMapping/>
@@ -2178,13 +1865,7 @@
       </p:grpSpPr>
       <p:sp>
         <p:nvSpPr>
-          <p:cNvPr id="2" name="标题 1">
-            <a:extLst>
-              <a:ext uri="{FF2B5EF4-FFF2-40B4-BE49-F238E27FC236}">
-                <a16:creationId xmlns:a16="http://schemas.microsoft.com/office/drawing/2014/main" id="{CD8C73A4-1DE1-408F-A774-0DFEAE113AAB}"/>
-              </a:ext>
-            </a:extLst>
-          </p:cNvPr>
+          <p:cNvPr id="2" name="标题 1"/>
           <p:cNvSpPr>
             <a:spLocks noGrp="1"/>
           </p:cNvSpPr>
@@ -2216,18 +1897,12 @@
       </p:sp>
       <p:sp>
         <p:nvSpPr>
-          <p:cNvPr id="3" name="内容占位符 2">
-            <a:extLst>
-              <a:ext uri="{FF2B5EF4-FFF2-40B4-BE49-F238E27FC236}">
-                <a16:creationId xmlns:a16="http://schemas.microsoft.com/office/drawing/2014/main" id="{34441222-FD6D-40AA-AB51-CF1069DF3916}"/>
-              </a:ext>
-            </a:extLst>
-          </p:cNvPr>
-          <p:cNvSpPr>
-            <a:spLocks noGrp="1"/>
-          </p:cNvSpPr>
-          <p:nvPr>
-            <p:ph idx="1"/>
+          <p:cNvPr id="3" name="内容占位符 2"/>
+          <p:cNvSpPr>
+            <a:spLocks noGrp="1"/>
+          </p:cNvSpPr>
+          <p:nvPr>
+            <p:ph idx="1" hasCustomPrompt="1"/>
           </p:nvPr>
         </p:nvSpPr>
         <p:spPr>
@@ -2273,6 +1948,7 @@
               <a:rPr lang="zh-CN" altLang="en-US"/>
               <a:t>编辑母版文本样式</a:t>
             </a:r>
+            <a:endParaRPr lang="zh-CN" altLang="en-US"/>
           </a:p>
           <a:p>
             <a:pPr lvl="1"/>
@@ -2280,6 +1956,7 @@
               <a:rPr lang="zh-CN" altLang="en-US"/>
               <a:t>第二级</a:t>
             </a:r>
+            <a:endParaRPr lang="zh-CN" altLang="en-US"/>
           </a:p>
           <a:p>
             <a:pPr lvl="2"/>
@@ -2287,6 +1964,7 @@
               <a:rPr lang="zh-CN" altLang="en-US"/>
               <a:t>第三级</a:t>
             </a:r>
+            <a:endParaRPr lang="zh-CN" altLang="en-US"/>
           </a:p>
           <a:p>
             <a:pPr lvl="3"/>
@@ -2294,6 +1972,7 @@
               <a:rPr lang="zh-CN" altLang="en-US"/>
               <a:t>第四级</a:t>
             </a:r>
+            <a:endParaRPr lang="zh-CN" altLang="en-US"/>
           </a:p>
           <a:p>
             <a:pPr lvl="4"/>
@@ -2307,18 +1986,12 @@
       </p:sp>
       <p:sp>
         <p:nvSpPr>
-          <p:cNvPr id="4" name="文本占位符 3">
-            <a:extLst>
-              <a:ext uri="{FF2B5EF4-FFF2-40B4-BE49-F238E27FC236}">
-                <a16:creationId xmlns:a16="http://schemas.microsoft.com/office/drawing/2014/main" id="{C517BDC4-7F57-4618-9396-AB43313FE2B7}"/>
-              </a:ext>
-            </a:extLst>
-          </p:cNvPr>
-          <p:cNvSpPr>
-            <a:spLocks noGrp="1"/>
-          </p:cNvSpPr>
-          <p:nvPr>
-            <p:ph type="body" sz="half" idx="2"/>
+          <p:cNvPr id="4" name="文本占位符 3"/>
+          <p:cNvSpPr>
+            <a:spLocks noGrp="1"/>
+          </p:cNvSpPr>
+          <p:nvPr>
+            <p:ph type="body" sz="half" idx="2" hasCustomPrompt="1"/>
           </p:nvPr>
         </p:nvSpPr>
         <p:spPr>
@@ -2373,18 +2046,13 @@
               <a:rPr lang="zh-CN" altLang="en-US"/>
               <a:t>编辑母版文本样式</a:t>
             </a:r>
-          </a:p>
-        </p:txBody>
-      </p:sp>
-      <p:sp>
-        <p:nvSpPr>
-          <p:cNvPr id="5" name="日期占位符 4">
-            <a:extLst>
-              <a:ext uri="{FF2B5EF4-FFF2-40B4-BE49-F238E27FC236}">
-                <a16:creationId xmlns:a16="http://schemas.microsoft.com/office/drawing/2014/main" id="{A10439FB-285B-41D9-BF83-E5C1F6FC35E6}"/>
-              </a:ext>
-            </a:extLst>
-          </p:cNvPr>
+            <a:endParaRPr lang="zh-CN" altLang="en-US"/>
+          </a:p>
+        </p:txBody>
+      </p:sp>
+      <p:sp>
+        <p:nvSpPr>
+          <p:cNvPr id="5" name="日期占位符 4"/>
           <p:cNvSpPr>
             <a:spLocks noGrp="1"/>
           </p:cNvSpPr>
@@ -2399,7 +2067,6 @@
           <a:p>
             <a:fld id="{EF4F237D-D39F-437D-B58E-A56F132280E9}" type="datetimeFigureOut">
               <a:rPr lang="en-US" smtClean="0"/>
-              <a:t>3/29/2024</a:t>
             </a:fld>
             <a:endParaRPr lang="en-US"/>
           </a:p>
@@ -2407,13 +2074,7 @@
       </p:sp>
       <p:sp>
         <p:nvSpPr>
-          <p:cNvPr id="6" name="页脚占位符 5">
-            <a:extLst>
-              <a:ext uri="{FF2B5EF4-FFF2-40B4-BE49-F238E27FC236}">
-                <a16:creationId xmlns:a16="http://schemas.microsoft.com/office/drawing/2014/main" id="{E1706E05-E2E1-40A5-B885-ED8E4A16B1D6}"/>
-              </a:ext>
-            </a:extLst>
-          </p:cNvPr>
+          <p:cNvPr id="6" name="页脚占位符 5"/>
           <p:cNvSpPr>
             <a:spLocks noGrp="1"/>
           </p:cNvSpPr>
@@ -2432,13 +2093,7 @@
       </p:sp>
       <p:sp>
         <p:nvSpPr>
-          <p:cNvPr id="7" name="灯片编号占位符 6">
-            <a:extLst>
-              <a:ext uri="{FF2B5EF4-FFF2-40B4-BE49-F238E27FC236}">
-                <a16:creationId xmlns:a16="http://schemas.microsoft.com/office/drawing/2014/main" id="{B268102A-BF9A-41FC-9E01-AD3AA93FA6B9}"/>
-              </a:ext>
-            </a:extLst>
-          </p:cNvPr>
+          <p:cNvPr id="7" name="灯片编号占位符 6"/>
           <p:cNvSpPr>
             <a:spLocks noGrp="1"/>
           </p:cNvSpPr>
@@ -2453,18 +2108,12 @@
           <a:p>
             <a:fld id="{0A805578-4521-47B2-8AD5-D762FC1C9EF5}" type="slidenum">
               <a:rPr lang="en-US" smtClean="0"/>
-              <a:t>‹#›</a:t>
             </a:fld>
             <a:endParaRPr lang="en-US"/>
           </a:p>
         </p:txBody>
       </p:sp>
     </p:spTree>
-    <p:extLst>
-      <p:ext uri="{BB962C8B-B14F-4D97-AF65-F5344CB8AC3E}">
-        <p14:creationId xmlns:p14="http://schemas.microsoft.com/office/powerpoint/2010/main" val="3824994261"/>
-      </p:ext>
-    </p:extLst>
   </p:cSld>
   <p:clrMapOvr>
     <a:masterClrMapping/>
@@ -2491,13 +2140,7 @@
       </p:grpSpPr>
       <p:sp>
         <p:nvSpPr>
-          <p:cNvPr id="2" name="标题 1">
-            <a:extLst>
-              <a:ext uri="{FF2B5EF4-FFF2-40B4-BE49-F238E27FC236}">
-                <a16:creationId xmlns:a16="http://schemas.microsoft.com/office/drawing/2014/main" id="{85F54A0A-0C64-4B93-997A-B670FE94D6EF}"/>
-              </a:ext>
-            </a:extLst>
-          </p:cNvPr>
+          <p:cNvPr id="2" name="标题 1"/>
           <p:cNvSpPr>
             <a:spLocks noGrp="1"/>
           </p:cNvSpPr>
@@ -2529,13 +2172,7 @@
       </p:sp>
       <p:sp>
         <p:nvSpPr>
-          <p:cNvPr id="3" name="图片占位符 2">
-            <a:extLst>
-              <a:ext uri="{FF2B5EF4-FFF2-40B4-BE49-F238E27FC236}">
-                <a16:creationId xmlns:a16="http://schemas.microsoft.com/office/drawing/2014/main" id="{08B49E39-D70B-4B3C-BF5A-58D5637E867D}"/>
-              </a:ext>
-            </a:extLst>
-          </p:cNvPr>
+          <p:cNvPr id="3" name="图片占位符 2"/>
           <p:cNvSpPr>
             <a:spLocks noGrp="1"/>
           </p:cNvSpPr>
@@ -2596,18 +2233,12 @@
       </p:sp>
       <p:sp>
         <p:nvSpPr>
-          <p:cNvPr id="4" name="文本占位符 3">
-            <a:extLst>
-              <a:ext uri="{FF2B5EF4-FFF2-40B4-BE49-F238E27FC236}">
-                <a16:creationId xmlns:a16="http://schemas.microsoft.com/office/drawing/2014/main" id="{4A7E6541-6D60-454D-BD16-A796ADAEA02F}"/>
-              </a:ext>
-            </a:extLst>
-          </p:cNvPr>
-          <p:cNvSpPr>
-            <a:spLocks noGrp="1"/>
-          </p:cNvSpPr>
-          <p:nvPr>
-            <p:ph type="body" sz="half" idx="2"/>
+          <p:cNvPr id="4" name="文本占位符 3"/>
+          <p:cNvSpPr>
+            <a:spLocks noGrp="1"/>
+          </p:cNvSpPr>
+          <p:nvPr>
+            <p:ph type="body" sz="half" idx="2" hasCustomPrompt="1"/>
           </p:nvPr>
         </p:nvSpPr>
         <p:spPr>
@@ -2662,18 +2293,13 @@
               <a:rPr lang="zh-CN" altLang="en-US"/>
               <a:t>编辑母版文本样式</a:t>
             </a:r>
-          </a:p>
-        </p:txBody>
-      </p:sp>
-      <p:sp>
-        <p:nvSpPr>
-          <p:cNvPr id="5" name="日期占位符 4">
-            <a:extLst>
-              <a:ext uri="{FF2B5EF4-FFF2-40B4-BE49-F238E27FC236}">
-                <a16:creationId xmlns:a16="http://schemas.microsoft.com/office/drawing/2014/main" id="{BA9A2161-C5C8-4AF0-81CA-F83749838E9C}"/>
-              </a:ext>
-            </a:extLst>
-          </p:cNvPr>
+            <a:endParaRPr lang="zh-CN" altLang="en-US"/>
+          </a:p>
+        </p:txBody>
+      </p:sp>
+      <p:sp>
+        <p:nvSpPr>
+          <p:cNvPr id="5" name="日期占位符 4"/>
           <p:cNvSpPr>
             <a:spLocks noGrp="1"/>
           </p:cNvSpPr>
@@ -2688,7 +2314,6 @@
           <a:p>
             <a:fld id="{EF4F237D-D39F-437D-B58E-A56F132280E9}" type="datetimeFigureOut">
               <a:rPr lang="en-US" smtClean="0"/>
-              <a:t>3/29/2024</a:t>
             </a:fld>
             <a:endParaRPr lang="en-US"/>
           </a:p>
@@ -2696,13 +2321,7 @@
       </p:sp>
       <p:sp>
         <p:nvSpPr>
-          <p:cNvPr id="6" name="页脚占位符 5">
-            <a:extLst>
-              <a:ext uri="{FF2B5EF4-FFF2-40B4-BE49-F238E27FC236}">
-                <a16:creationId xmlns:a16="http://schemas.microsoft.com/office/drawing/2014/main" id="{1A618DF9-055A-40A0-A124-6DC646336B6B}"/>
-              </a:ext>
-            </a:extLst>
-          </p:cNvPr>
+          <p:cNvPr id="6" name="页脚占位符 5"/>
           <p:cNvSpPr>
             <a:spLocks noGrp="1"/>
           </p:cNvSpPr>
@@ -2721,13 +2340,7 @@
       </p:sp>
       <p:sp>
         <p:nvSpPr>
-          <p:cNvPr id="7" name="灯片编号占位符 6">
-            <a:extLst>
-              <a:ext uri="{FF2B5EF4-FFF2-40B4-BE49-F238E27FC236}">
-                <a16:creationId xmlns:a16="http://schemas.microsoft.com/office/drawing/2014/main" id="{93BC333C-1CFA-4D1E-89C0-698A7C7FE2FC}"/>
-              </a:ext>
-            </a:extLst>
-          </p:cNvPr>
+          <p:cNvPr id="7" name="灯片编号占位符 6"/>
           <p:cNvSpPr>
             <a:spLocks noGrp="1"/>
           </p:cNvSpPr>
@@ -2742,18 +2355,12 @@
           <a:p>
             <a:fld id="{0A805578-4521-47B2-8AD5-D762FC1C9EF5}" type="slidenum">
               <a:rPr lang="en-US" smtClean="0"/>
-              <a:t>‹#›</a:t>
             </a:fld>
             <a:endParaRPr lang="en-US"/>
           </a:p>
         </p:txBody>
       </p:sp>
     </p:spTree>
-    <p:extLst>
-      <p:ext uri="{BB962C8B-B14F-4D97-AF65-F5344CB8AC3E}">
-        <p14:creationId xmlns:p14="http://schemas.microsoft.com/office/powerpoint/2010/main" val="1323147958"/>
-      </p:ext>
-    </p:extLst>
   </p:cSld>
   <p:clrMapOvr>
     <a:masterClrMapping/>
@@ -2785,13 +2392,7 @@
       </p:grpSpPr>
       <p:sp>
         <p:nvSpPr>
-          <p:cNvPr id="2" name="标题占位符 1">
-            <a:extLst>
-              <a:ext uri="{FF2B5EF4-FFF2-40B4-BE49-F238E27FC236}">
-                <a16:creationId xmlns:a16="http://schemas.microsoft.com/office/drawing/2014/main" id="{5F09B734-7EE1-49A2-B4C2-7CBB9CADB80C}"/>
-              </a:ext>
-            </a:extLst>
-          </p:cNvPr>
+          <p:cNvPr id="2" name="标题占位符 1"/>
           <p:cNvSpPr>
             <a:spLocks noGrp="1"/>
           </p:cNvSpPr>
@@ -2824,13 +2425,7 @@
       </p:sp>
       <p:sp>
         <p:nvSpPr>
-          <p:cNvPr id="3" name="文本占位符 2">
-            <a:extLst>
-              <a:ext uri="{FF2B5EF4-FFF2-40B4-BE49-F238E27FC236}">
-                <a16:creationId xmlns:a16="http://schemas.microsoft.com/office/drawing/2014/main" id="{483E56C2-8923-43B0-898E-FA30F24860FA}"/>
-              </a:ext>
-            </a:extLst>
-          </p:cNvPr>
+          <p:cNvPr id="3" name="文本占位符 2"/>
           <p:cNvSpPr>
             <a:spLocks noGrp="1"/>
           </p:cNvSpPr>
@@ -2858,6 +2453,7 @@
               <a:rPr lang="zh-CN" altLang="en-US"/>
               <a:t>编辑母版文本样式</a:t>
             </a:r>
+            <a:endParaRPr lang="zh-CN" altLang="en-US"/>
           </a:p>
           <a:p>
             <a:pPr lvl="1"/>
@@ -2865,6 +2461,7 @@
               <a:rPr lang="zh-CN" altLang="en-US"/>
               <a:t>第二级</a:t>
             </a:r>
+            <a:endParaRPr lang="zh-CN" altLang="en-US"/>
           </a:p>
           <a:p>
             <a:pPr lvl="2"/>
@@ -2872,6 +2469,7 @@
               <a:rPr lang="zh-CN" altLang="en-US"/>
               <a:t>第三级</a:t>
             </a:r>
+            <a:endParaRPr lang="zh-CN" altLang="en-US"/>
           </a:p>
           <a:p>
             <a:pPr lvl="3"/>
@@ -2879,6 +2477,7 @@
               <a:rPr lang="zh-CN" altLang="en-US"/>
               <a:t>第四级</a:t>
             </a:r>
+            <a:endParaRPr lang="zh-CN" altLang="en-US"/>
           </a:p>
           <a:p>
             <a:pPr lvl="4"/>
@@ -2892,13 +2491,7 @@
       </p:sp>
       <p:sp>
         <p:nvSpPr>
-          <p:cNvPr id="4" name="日期占位符 3">
-            <a:extLst>
-              <a:ext uri="{FF2B5EF4-FFF2-40B4-BE49-F238E27FC236}">
-                <a16:creationId xmlns:a16="http://schemas.microsoft.com/office/drawing/2014/main" id="{B8C4B33E-055C-42A7-B208-6FBF95FD422D}"/>
-              </a:ext>
-            </a:extLst>
-          </p:cNvPr>
+          <p:cNvPr id="4" name="日期占位符 3"/>
           <p:cNvSpPr>
             <a:spLocks noGrp="1"/>
           </p:cNvSpPr>
@@ -2931,7 +2524,6 @@
           <a:p>
             <a:fld id="{EF4F237D-D39F-437D-B58E-A56F132280E9}" type="datetimeFigureOut">
               <a:rPr lang="en-US" smtClean="0"/>
-              <a:t>3/29/2024</a:t>
             </a:fld>
             <a:endParaRPr lang="en-US"/>
           </a:p>
@@ -2939,13 +2531,7 @@
       </p:sp>
       <p:sp>
         <p:nvSpPr>
-          <p:cNvPr id="5" name="页脚占位符 4">
-            <a:extLst>
-              <a:ext uri="{FF2B5EF4-FFF2-40B4-BE49-F238E27FC236}">
-                <a16:creationId xmlns:a16="http://schemas.microsoft.com/office/drawing/2014/main" id="{7231F11F-8033-4E39-B866-609FB78B9D44}"/>
-              </a:ext>
-            </a:extLst>
-          </p:cNvPr>
+          <p:cNvPr id="5" name="页脚占位符 4"/>
           <p:cNvSpPr>
             <a:spLocks noGrp="1"/>
           </p:cNvSpPr>
@@ -2982,13 +2568,7 @@
       </p:sp>
       <p:sp>
         <p:nvSpPr>
-          <p:cNvPr id="6" name="灯片编号占位符 5">
-            <a:extLst>
-              <a:ext uri="{FF2B5EF4-FFF2-40B4-BE49-F238E27FC236}">
-                <a16:creationId xmlns:a16="http://schemas.microsoft.com/office/drawing/2014/main" id="{B66DB793-433F-4BE0-A719-B9E71E64A2FB}"/>
-              </a:ext>
-            </a:extLst>
-          </p:cNvPr>
+          <p:cNvPr id="6" name="灯片编号占位符 5"/>
           <p:cNvSpPr>
             <a:spLocks noGrp="1"/>
           </p:cNvSpPr>
@@ -3021,18 +2601,12 @@
           <a:p>
             <a:fld id="{0A805578-4521-47B2-8AD5-D762FC1C9EF5}" type="slidenum">
               <a:rPr lang="en-US" smtClean="0"/>
-              <a:t>‹#›</a:t>
             </a:fld>
             <a:endParaRPr lang="en-US"/>
           </a:p>
         </p:txBody>
       </p:sp>
     </p:spTree>
-    <p:extLst>
-      <p:ext uri="{BB962C8B-B14F-4D97-AF65-F5344CB8AC3E}">
-        <p14:creationId xmlns:p14="http://schemas.microsoft.com/office/powerpoint/2010/main" val="2884286477"/>
-      </p:ext>
-    </p:extLst>
   </p:cSld>
   <p:clrMap bg1="lt1" tx1="dk1" bg2="lt2" tx2="dk2" accent1="accent1" accent2="accent2" accent3="accent3" accent4="accent4" accent5="accent5" accent6="accent6" hlink="hlink" folHlink="folHlink"/>
   <p:sldLayoutIdLst>
@@ -3350,13 +2924,37 @@
       </p:grpSpPr>
       <p:pic>
         <p:nvPicPr>
-          <p:cNvPr id="17" name="图片 16">
+          <p:cNvPr id="23" name="图片 22"/>
+          <p:cNvPicPr>
+            <a:picLocks noChangeAspect="1"/>
+          </p:cNvPicPr>
+          <p:nvPr/>
+        </p:nvPicPr>
+        <p:blipFill>
+          <a:blip r:embed="rId1">
             <a:extLst>
-              <a:ext uri="{FF2B5EF4-FFF2-40B4-BE49-F238E27FC236}">
-                <a16:creationId xmlns:a16="http://schemas.microsoft.com/office/drawing/2014/main" id="{D772646A-C45C-481B-AE18-26C174D31EF7}"/>
+              <a:ext uri="{28A0092B-C50C-407E-A947-70E740481C1C}">
+                <a14:useLocalDpi xmlns:a14="http://schemas.microsoft.com/office/drawing/2010/main" val="0"/>
               </a:ext>
             </a:extLst>
-          </p:cNvPr>
+          </a:blip>
+          <a:stretch>
+            <a:fillRect/>
+          </a:stretch>
+        </p:blipFill>
+        <p:spPr>
+          <a:xfrm>
+            <a:off x="6205963" y="2769686"/>
+            <a:ext cx="1843474" cy="762155"/>
+          </a:xfrm>
+          <a:prstGeom prst="rect">
+            <a:avLst/>
+          </a:prstGeom>
+        </p:spPr>
+      </p:pic>
+      <p:pic>
+        <p:nvPicPr>
+          <p:cNvPr id="27" name="图片 26"/>
           <p:cNvPicPr>
             <a:picLocks noChangeAspect="1"/>
           </p:cNvPicPr>
@@ -3376,30 +2974,213 @@
         </p:blipFill>
         <p:spPr>
           <a:xfrm>
-            <a:off x="6192855" y="628383"/>
-            <a:ext cx="1899824" cy="628574"/>
+            <a:off x="8490729" y="2429241"/>
+            <a:ext cx="1376845" cy="1376845"/>
           </a:xfrm>
           <a:prstGeom prst="rect">
             <a:avLst/>
           </a:prstGeom>
         </p:spPr>
       </p:pic>
+      <p:sp>
+        <p:nvSpPr>
+          <p:cNvPr id="11" name="文本框 10"/>
+          <p:cNvSpPr txBox="1"/>
+          <p:nvPr/>
+        </p:nvSpPr>
+        <p:spPr>
+          <a:xfrm>
+            <a:off x="8533555" y="3806085"/>
+            <a:ext cx="1335623" cy="646331"/>
+          </a:xfrm>
+          <a:prstGeom prst="rect">
+            <a:avLst/>
+          </a:prstGeom>
+          <a:noFill/>
+        </p:spPr>
+        <p:txBody>
+          <a:bodyPr wrap="none" rtlCol="0">
+            <a:spAutoFit/>
+          </a:bodyPr>
+          <a:lstStyle/>
+          <a:p>
+            <a:pPr algn="ctr"/>
+            <a:r>
+              <a:rPr lang="en-US" altLang="zh-CN" b="1" dirty="0">
+                <a:solidFill>
+                  <a:schemeClr val="bg2">
+                    <a:lumMod val="75000"/>
+                  </a:schemeClr>
+                </a:solidFill>
+              </a:rPr>
+              <a:t>PhD </a:t>
+            </a:r>
+            <a:endParaRPr lang="en-US" altLang="zh-CN" b="1" dirty="0">
+              <a:solidFill>
+                <a:schemeClr val="bg2">
+                  <a:lumMod val="75000"/>
+                </a:schemeClr>
+              </a:solidFill>
+            </a:endParaRPr>
+          </a:p>
+          <a:p>
+            <a:pPr algn="ctr"/>
+            <a:r>
+              <a:rPr lang="en-US" altLang="zh-CN" b="1" dirty="0">
+                <a:solidFill>
+                  <a:schemeClr val="bg2">
+                    <a:lumMod val="75000"/>
+                  </a:schemeClr>
+                </a:solidFill>
+              </a:rPr>
+              <a:t>(2019-2023)</a:t>
+            </a:r>
+            <a:endParaRPr lang="en-US" b="1" dirty="0">
+              <a:solidFill>
+                <a:schemeClr val="bg2">
+                  <a:lumMod val="75000"/>
+                </a:schemeClr>
+              </a:solidFill>
+            </a:endParaRPr>
+          </a:p>
+        </p:txBody>
+      </p:sp>
+      <p:sp>
+        <p:nvSpPr>
+          <p:cNvPr id="12" name="文本框 11"/>
+          <p:cNvSpPr txBox="1"/>
+          <p:nvPr/>
+        </p:nvSpPr>
+        <p:spPr>
+          <a:xfrm>
+            <a:off x="6346727" y="3806084"/>
+            <a:ext cx="1702710" cy="646331"/>
+          </a:xfrm>
+          <a:prstGeom prst="rect">
+            <a:avLst/>
+          </a:prstGeom>
+          <a:noFill/>
+        </p:spPr>
+        <p:txBody>
+          <a:bodyPr wrap="none" rtlCol="0">
+            <a:spAutoFit/>
+          </a:bodyPr>
+          <a:lstStyle/>
+          <a:p>
+            <a:pPr algn="ctr"/>
+            <a:r>
+              <a:rPr lang="en-US" altLang="zh-CN" b="1" dirty="0">
+                <a:solidFill>
+                  <a:schemeClr val="bg2">
+                    <a:lumMod val="75000"/>
+                  </a:schemeClr>
+                </a:solidFill>
+              </a:rPr>
+              <a:t>Visiting Scholar </a:t>
+            </a:r>
+            <a:endParaRPr lang="en-US" altLang="zh-CN" b="1" dirty="0">
+              <a:solidFill>
+                <a:schemeClr val="bg2">
+                  <a:lumMod val="75000"/>
+                </a:schemeClr>
+              </a:solidFill>
+            </a:endParaRPr>
+          </a:p>
+          <a:p>
+            <a:pPr algn="ctr"/>
+            <a:r>
+              <a:rPr lang="en-US" altLang="zh-CN" b="1" dirty="0">
+                <a:solidFill>
+                  <a:schemeClr val="bg2">
+                    <a:lumMod val="75000"/>
+                  </a:schemeClr>
+                </a:solidFill>
+              </a:rPr>
+              <a:t>(2022-2023)</a:t>
+            </a:r>
+            <a:endParaRPr lang="en-US" b="1" dirty="0">
+              <a:solidFill>
+                <a:schemeClr val="bg2">
+                  <a:lumMod val="75000"/>
+                </a:schemeClr>
+              </a:solidFill>
+            </a:endParaRPr>
+          </a:p>
+        </p:txBody>
+      </p:sp>
+      <p:sp>
+        <p:nvSpPr>
+          <p:cNvPr id="18" name="文本框 17"/>
+          <p:cNvSpPr txBox="1"/>
+          <p:nvPr/>
+        </p:nvSpPr>
+        <p:spPr>
+          <a:xfrm>
+            <a:off x="4365050" y="3817867"/>
+            <a:ext cx="1422400" cy="645160"/>
+          </a:xfrm>
+          <a:prstGeom prst="rect">
+            <a:avLst/>
+          </a:prstGeom>
+          <a:noFill/>
+        </p:spPr>
+        <p:txBody>
+          <a:bodyPr wrap="none" rtlCol="0">
+            <a:spAutoFit/>
+          </a:bodyPr>
+          <a:lstStyle/>
+          <a:p>
+            <a:pPr algn="ctr"/>
+            <a:r>
+              <a:rPr lang="en-US" altLang="zh-CN" b="1" dirty="0">
+                <a:solidFill>
+                  <a:schemeClr val="bg2">
+                    <a:lumMod val="75000"/>
+                  </a:schemeClr>
+                </a:solidFill>
+              </a:rPr>
+              <a:t>Postdoc</a:t>
+            </a:r>
+            <a:endParaRPr lang="en-US" altLang="zh-CN" b="1" dirty="0">
+              <a:solidFill>
+                <a:schemeClr val="bg2">
+                  <a:lumMod val="75000"/>
+                </a:schemeClr>
+              </a:solidFill>
+            </a:endParaRPr>
+          </a:p>
+          <a:p>
+            <a:pPr algn="ctr"/>
+            <a:r>
+              <a:rPr lang="en-US" altLang="zh-CN" b="1" dirty="0">
+                <a:solidFill>
+                  <a:schemeClr val="bg2">
+                    <a:lumMod val="75000"/>
+                  </a:schemeClr>
+                </a:solidFill>
+              </a:rPr>
+              <a:t>(2023 - 2025)</a:t>
+            </a:r>
+            <a:endParaRPr lang="en-US" b="1" dirty="0">
+              <a:solidFill>
+                <a:schemeClr val="bg2">
+                  <a:lumMod val="75000"/>
+                </a:schemeClr>
+              </a:solidFill>
+            </a:endParaRPr>
+          </a:p>
+        </p:txBody>
+      </p:sp>
       <p:pic>
         <p:nvPicPr>
-          <p:cNvPr id="23" name="图片 22">
-            <a:extLst>
-              <a:ext uri="{FF2B5EF4-FFF2-40B4-BE49-F238E27FC236}">
-                <a16:creationId xmlns:a16="http://schemas.microsoft.com/office/drawing/2014/main" id="{47326C3D-21E7-4C19-9AC2-E113612BAC9D}"/>
-              </a:ext>
-            </a:extLst>
-          </p:cNvPr>
+          <p:cNvPr id="22" name="图片 21"/>
           <p:cNvPicPr>
             <a:picLocks noChangeAspect="1"/>
           </p:cNvPicPr>
           <p:nvPr/>
         </p:nvPicPr>
         <p:blipFill>
-          <a:blip r:embed="rId3">
+          <a:blip r:embed="rId2">
             <a:extLst>
               <a:ext uri="{28A0092B-C50C-407E-A947-70E740481C1C}">
                 <a14:useLocalDpi xmlns:a14="http://schemas.microsoft.com/office/drawing/2010/main" val="0"/>
@@ -3412,327 +3193,7 @@
         </p:blipFill>
         <p:spPr>
           <a:xfrm>
-            <a:off x="2270233" y="2661736"/>
-            <a:ext cx="1843474" cy="762155"/>
-          </a:xfrm>
-          <a:prstGeom prst="rect">
-            <a:avLst/>
-          </a:prstGeom>
-        </p:spPr>
-      </p:pic>
-      <p:pic>
-        <p:nvPicPr>
-          <p:cNvPr id="27" name="图片 26">
-            <a:extLst>
-              <a:ext uri="{FF2B5EF4-FFF2-40B4-BE49-F238E27FC236}">
-                <a16:creationId xmlns:a16="http://schemas.microsoft.com/office/drawing/2014/main" id="{02E0B50E-5E42-401C-99B7-0A1F33F51098}"/>
-              </a:ext>
-            </a:extLst>
-          </p:cNvPr>
-          <p:cNvPicPr>
-            <a:picLocks noChangeAspect="1"/>
-          </p:cNvPicPr>
-          <p:nvPr/>
-        </p:nvPicPr>
-        <p:blipFill>
-          <a:blip r:embed="rId4">
-            <a:extLst>
-              <a:ext uri="{28A0092B-C50C-407E-A947-70E740481C1C}">
-                <a14:useLocalDpi xmlns:a14="http://schemas.microsoft.com/office/drawing/2010/main" val="0"/>
-              </a:ext>
-            </a:extLst>
-          </a:blip>
-          <a:stretch>
-            <a:fillRect/>
-          </a:stretch>
-        </p:blipFill>
-        <p:spPr>
-          <a:xfrm>
-            <a:off x="4554999" y="2321291"/>
-            <a:ext cx="1376845" cy="1376845"/>
-          </a:xfrm>
-          <a:prstGeom prst="rect">
-            <a:avLst/>
-          </a:prstGeom>
-        </p:spPr>
-      </p:pic>
-      <p:sp>
-        <p:nvSpPr>
-          <p:cNvPr id="11" name="文本框 10">
-            <a:extLst>
-              <a:ext uri="{FF2B5EF4-FFF2-40B4-BE49-F238E27FC236}">
-                <a16:creationId xmlns:a16="http://schemas.microsoft.com/office/drawing/2014/main" id="{6AE191D0-7530-471D-981D-A3D299696019}"/>
-              </a:ext>
-            </a:extLst>
-          </p:cNvPr>
-          <p:cNvSpPr txBox="1"/>
-          <p:nvPr/>
-        </p:nvSpPr>
-        <p:spPr>
-          <a:xfrm>
-            <a:off x="4597825" y="3698135"/>
-            <a:ext cx="1335623" cy="646331"/>
-          </a:xfrm>
-          <a:prstGeom prst="rect">
-            <a:avLst/>
-          </a:prstGeom>
-          <a:noFill/>
-        </p:spPr>
-        <p:txBody>
-          <a:bodyPr wrap="none" rtlCol="0">
-            <a:spAutoFit/>
-          </a:bodyPr>
-          <a:lstStyle/>
-          <a:p>
-            <a:pPr algn="ctr"/>
-            <a:r>
-              <a:rPr lang="en-US" altLang="zh-CN" b="1" dirty="0">
-                <a:solidFill>
-                  <a:schemeClr val="bg2">
-                    <a:lumMod val="75000"/>
-                  </a:schemeClr>
-                </a:solidFill>
-              </a:rPr>
-              <a:t>PhD </a:t>
-            </a:r>
-          </a:p>
-          <a:p>
-            <a:pPr algn="ctr"/>
-            <a:r>
-              <a:rPr lang="en-US" altLang="zh-CN" b="1" dirty="0">
-                <a:solidFill>
-                  <a:schemeClr val="bg2">
-                    <a:lumMod val="75000"/>
-                  </a:schemeClr>
-                </a:solidFill>
-              </a:rPr>
-              <a:t>(2019-2023)</a:t>
-            </a:r>
-            <a:endParaRPr lang="en-US" b="1" dirty="0">
-              <a:solidFill>
-                <a:schemeClr val="bg2">
-                  <a:lumMod val="75000"/>
-                </a:schemeClr>
-              </a:solidFill>
-            </a:endParaRPr>
-          </a:p>
-        </p:txBody>
-      </p:sp>
-      <p:sp>
-        <p:nvSpPr>
-          <p:cNvPr id="12" name="文本框 11">
-            <a:extLst>
-              <a:ext uri="{FF2B5EF4-FFF2-40B4-BE49-F238E27FC236}">
-                <a16:creationId xmlns:a16="http://schemas.microsoft.com/office/drawing/2014/main" id="{0C0A3D70-0831-4D70-8D34-68D1A0D4F1B7}"/>
-              </a:ext>
-            </a:extLst>
-          </p:cNvPr>
-          <p:cNvSpPr txBox="1"/>
-          <p:nvPr/>
-        </p:nvSpPr>
-        <p:spPr>
-          <a:xfrm>
-            <a:off x="2410997" y="3698134"/>
-            <a:ext cx="1702710" cy="646331"/>
-          </a:xfrm>
-          <a:prstGeom prst="rect">
-            <a:avLst/>
-          </a:prstGeom>
-          <a:noFill/>
-        </p:spPr>
-        <p:txBody>
-          <a:bodyPr wrap="none" rtlCol="0">
-            <a:spAutoFit/>
-          </a:bodyPr>
-          <a:lstStyle/>
-          <a:p>
-            <a:pPr algn="ctr"/>
-            <a:r>
-              <a:rPr lang="en-US" altLang="zh-CN" b="1" dirty="0">
-                <a:solidFill>
-                  <a:schemeClr val="bg2">
-                    <a:lumMod val="75000"/>
-                  </a:schemeClr>
-                </a:solidFill>
-              </a:rPr>
-              <a:t>Visiting Scholar </a:t>
-            </a:r>
-          </a:p>
-          <a:p>
-            <a:pPr algn="ctr"/>
-            <a:r>
-              <a:rPr lang="en-US" altLang="zh-CN" b="1" dirty="0">
-                <a:solidFill>
-                  <a:schemeClr val="bg2">
-                    <a:lumMod val="75000"/>
-                  </a:schemeClr>
-                </a:solidFill>
-              </a:rPr>
-              <a:t>(2022-2023)</a:t>
-            </a:r>
-            <a:endParaRPr lang="en-US" b="1" dirty="0">
-              <a:solidFill>
-                <a:schemeClr val="bg2">
-                  <a:lumMod val="75000"/>
-                </a:schemeClr>
-              </a:solidFill>
-            </a:endParaRPr>
-          </a:p>
-        </p:txBody>
-      </p:sp>
-      <p:sp>
-        <p:nvSpPr>
-          <p:cNvPr id="14" name="文本框 13">
-            <a:extLst>
-              <a:ext uri="{FF2B5EF4-FFF2-40B4-BE49-F238E27FC236}">
-                <a16:creationId xmlns:a16="http://schemas.microsoft.com/office/drawing/2014/main" id="{01214FCB-DE8E-4E7D-A9E3-EF5C9A400C71}"/>
-              </a:ext>
-            </a:extLst>
-          </p:cNvPr>
-          <p:cNvSpPr txBox="1"/>
-          <p:nvPr/>
-        </p:nvSpPr>
-        <p:spPr>
-          <a:xfrm>
-            <a:off x="6373041" y="1586915"/>
-            <a:ext cx="1719638" cy="646331"/>
-          </a:xfrm>
-          <a:prstGeom prst="rect">
-            <a:avLst/>
-          </a:prstGeom>
-          <a:noFill/>
-        </p:spPr>
-        <p:txBody>
-          <a:bodyPr wrap="none" rtlCol="0">
-            <a:spAutoFit/>
-          </a:bodyPr>
-          <a:lstStyle/>
-          <a:p>
-            <a:pPr algn="ctr"/>
-            <a:r>
-              <a:rPr lang="en-US" altLang="zh-CN" b="1" dirty="0">
-                <a:solidFill>
-                  <a:schemeClr val="bg2">
-                    <a:lumMod val="75000"/>
-                  </a:schemeClr>
-                </a:solidFill>
-              </a:rPr>
-              <a:t>Visiting Scholar </a:t>
-            </a:r>
-          </a:p>
-          <a:p>
-            <a:pPr algn="ctr"/>
-            <a:r>
-              <a:rPr lang="en-US" altLang="zh-CN" b="1" dirty="0">
-                <a:solidFill>
-                  <a:schemeClr val="bg2">
-                    <a:lumMod val="75000"/>
-                  </a:schemeClr>
-                </a:solidFill>
-              </a:rPr>
-              <a:t>(2024-2025)</a:t>
-            </a:r>
-            <a:endParaRPr lang="en-US" b="1" dirty="0">
-              <a:solidFill>
-                <a:schemeClr val="bg2">
-                  <a:lumMod val="75000"/>
-                </a:schemeClr>
-              </a:solidFill>
-            </a:endParaRPr>
-          </a:p>
-        </p:txBody>
-      </p:sp>
-      <p:sp>
-        <p:nvSpPr>
-          <p:cNvPr id="18" name="文本框 17">
-            <a:extLst>
-              <a:ext uri="{FF2B5EF4-FFF2-40B4-BE49-F238E27FC236}">
-                <a16:creationId xmlns:a16="http://schemas.microsoft.com/office/drawing/2014/main" id="{0F93BB78-1C1D-49B3-ADD9-1DC3410E7693}"/>
-              </a:ext>
-            </a:extLst>
-          </p:cNvPr>
-          <p:cNvSpPr txBox="1"/>
-          <p:nvPr/>
-        </p:nvSpPr>
-        <p:spPr>
-          <a:xfrm>
-            <a:off x="653848" y="3709917"/>
-            <a:ext cx="973343" cy="646331"/>
-          </a:xfrm>
-          <a:prstGeom prst="rect">
-            <a:avLst/>
-          </a:prstGeom>
-          <a:noFill/>
-        </p:spPr>
-        <p:txBody>
-          <a:bodyPr wrap="none" rtlCol="0">
-            <a:spAutoFit/>
-          </a:bodyPr>
-          <a:lstStyle/>
-          <a:p>
-            <a:pPr algn="ctr"/>
-            <a:r>
-              <a:rPr lang="en-US" altLang="zh-CN" b="1" dirty="0">
-                <a:solidFill>
-                  <a:schemeClr val="bg2">
-                    <a:lumMod val="75000"/>
-                  </a:schemeClr>
-                </a:solidFill>
-              </a:rPr>
-              <a:t>Postdoc</a:t>
-            </a:r>
-          </a:p>
-          <a:p>
-            <a:pPr algn="ctr"/>
-            <a:r>
-              <a:rPr lang="en-US" altLang="zh-CN" b="1" dirty="0">
-                <a:solidFill>
-                  <a:schemeClr val="bg2">
-                    <a:lumMod val="75000"/>
-                  </a:schemeClr>
-                </a:solidFill>
-              </a:rPr>
-              <a:t>(2023 - )</a:t>
-            </a:r>
-            <a:endParaRPr lang="en-US" b="1" dirty="0">
-              <a:solidFill>
-                <a:schemeClr val="bg2">
-                  <a:lumMod val="75000"/>
-                </a:schemeClr>
-              </a:solidFill>
-            </a:endParaRPr>
-          </a:p>
-        </p:txBody>
-      </p:sp>
-      <p:pic>
-        <p:nvPicPr>
-          <p:cNvPr id="22" name="图片 21">
-            <a:extLst>
-              <a:ext uri="{FF2B5EF4-FFF2-40B4-BE49-F238E27FC236}">
-                <a16:creationId xmlns:a16="http://schemas.microsoft.com/office/drawing/2014/main" id="{D1A98DCE-D21E-472C-8866-1CD1C091B74A}"/>
-              </a:ext>
-            </a:extLst>
-          </p:cNvPr>
-          <p:cNvPicPr>
-            <a:picLocks noChangeAspect="1"/>
-          </p:cNvPicPr>
-          <p:nvPr/>
-        </p:nvPicPr>
-        <p:blipFill>
-          <a:blip r:embed="rId4">
-            <a:extLst>
-              <a:ext uri="{28A0092B-C50C-407E-A947-70E740481C1C}">
-                <a14:useLocalDpi xmlns:a14="http://schemas.microsoft.com/office/drawing/2010/main" val="0"/>
-              </a:ext>
-            </a:extLst>
-          </a:blip>
-          <a:stretch>
-            <a:fillRect/>
-          </a:stretch>
-        </p:blipFill>
-        <p:spPr>
-          <a:xfrm>
-            <a:off x="452096" y="2321291"/>
+            <a:off x="4387826" y="2429241"/>
             <a:ext cx="1376845" cy="1376845"/>
           </a:xfrm>
           <a:prstGeom prst="rect">
@@ -3742,28 +3203,107 @@
       </p:pic>
       <p:pic>
         <p:nvPicPr>
-          <p:cNvPr id="2" name="图片 1">
-            <a:extLst>
-              <a:ext uri="{FF2B5EF4-FFF2-40B4-BE49-F238E27FC236}">
-                <a16:creationId xmlns:a16="http://schemas.microsoft.com/office/drawing/2014/main" id="{94491737-AD25-41B3-A24E-B38E0896EA9C}"/>
-              </a:ext>
-            </a:extLst>
-          </p:cNvPr>
+          <p:cNvPr id="4" name="图片 3"/>
+          <p:cNvPicPr/>
+          <p:nvPr/>
+        </p:nvPicPr>
+        <p:blipFill>
+          <a:blip r:embed="rId3"/>
+          <a:stretch>
+            <a:fillRect/>
+          </a:stretch>
+        </p:blipFill>
+        <p:spPr>
+          <a:xfrm>
+            <a:off x="2732405" y="2538730"/>
+            <a:ext cx="1214120" cy="1224280"/>
+          </a:xfrm>
+          <a:prstGeom prst="rect">
+            <a:avLst/>
+          </a:prstGeom>
+        </p:spPr>
+      </p:pic>
+      <p:sp>
+        <p:nvSpPr>
+          <p:cNvPr id="5" name="文本框 4"/>
+          <p:cNvSpPr txBox="1"/>
+          <p:nvPr/>
+        </p:nvSpPr>
+        <p:spPr>
+          <a:xfrm>
+            <a:off x="2306380" y="3806437"/>
+            <a:ext cx="2025650" cy="645160"/>
+          </a:xfrm>
+          <a:prstGeom prst="rect">
+            <a:avLst/>
+          </a:prstGeom>
+          <a:noFill/>
+        </p:spPr>
+        <p:txBody>
+          <a:bodyPr wrap="none" rtlCol="0">
+            <a:spAutoFit/>
+          </a:bodyPr>
+          <a:lstStyle/>
+          <a:p>
+            <a:pPr algn="ctr"/>
+            <a:r>
+              <a:rPr lang="en-US" altLang="zh-CN" b="1" dirty="0">
+                <a:solidFill>
+                  <a:schemeClr val="bg2">
+                    <a:lumMod val="75000"/>
+                  </a:schemeClr>
+                </a:solidFill>
+              </a:rPr>
+              <a:t>Associate Professor</a:t>
+            </a:r>
+            <a:endParaRPr lang="en-US" altLang="zh-CN" b="1" dirty="0">
+              <a:solidFill>
+                <a:schemeClr val="bg2">
+                  <a:lumMod val="75000"/>
+                </a:schemeClr>
+              </a:solidFill>
+            </a:endParaRPr>
+          </a:p>
+          <a:p>
+            <a:pPr algn="ctr"/>
+            <a:r>
+              <a:rPr lang="en-US" altLang="zh-CN" b="1" dirty="0">
+                <a:solidFill>
+                  <a:schemeClr val="bg2">
+                    <a:lumMod val="75000"/>
+                  </a:schemeClr>
+                </a:solidFill>
+              </a:rPr>
+              <a:t>(2026 - )</a:t>
+            </a:r>
+            <a:endParaRPr lang="en-US" b="1" dirty="0">
+              <a:solidFill>
+                <a:schemeClr val="bg2">
+                  <a:lumMod val="75000"/>
+                </a:schemeClr>
+              </a:solidFill>
+            </a:endParaRPr>
+          </a:p>
+        </p:txBody>
+      </p:sp>
+      <p:pic>
+        <p:nvPicPr>
+          <p:cNvPr id="6" name="图片 5"/>
           <p:cNvPicPr>
             <a:picLocks noChangeAspect="1"/>
           </p:cNvPicPr>
           <p:nvPr/>
         </p:nvPicPr>
         <p:blipFill>
-          <a:blip r:embed="rId5"/>
+          <a:blip r:embed="rId4"/>
           <a:stretch>
             <a:fillRect/>
           </a:stretch>
         </p:blipFill>
         <p:spPr>
           <a:xfrm>
-            <a:off x="5426354" y="2216777"/>
-            <a:ext cx="5529551" cy="2127688"/>
+            <a:off x="1200150" y="945515"/>
+            <a:ext cx="7562850" cy="2038350"/>
           </a:xfrm>
           <a:prstGeom prst="rect">
             <a:avLst/>
@@ -3771,11 +3311,6 @@
         </p:spPr>
       </p:pic>
     </p:spTree>
-    <p:extLst>
-      <p:ext uri="{BB962C8B-B14F-4D97-AF65-F5344CB8AC3E}">
-        <p14:creationId xmlns:p14="http://schemas.microsoft.com/office/powerpoint/2010/main" val="3251803142"/>
-      </p:ext>
-    </p:extLst>
   </p:cSld>
   <p:clrMapOvr>
     <a:masterClrMapping/>
@@ -3802,20 +3337,14 @@
       </p:grpSpPr>
       <p:pic>
         <p:nvPicPr>
-          <p:cNvPr id="23" name="图片 22">
-            <a:extLst>
-              <a:ext uri="{FF2B5EF4-FFF2-40B4-BE49-F238E27FC236}">
-                <a16:creationId xmlns:a16="http://schemas.microsoft.com/office/drawing/2014/main" id="{47326C3D-21E7-4C19-9AC2-E113612BAC9D}"/>
-              </a:ext>
-            </a:extLst>
-          </p:cNvPr>
+          <p:cNvPr id="23" name="图片 22"/>
           <p:cNvPicPr>
             <a:picLocks noChangeAspect="1"/>
           </p:cNvPicPr>
           <p:nvPr/>
         </p:nvPicPr>
         <p:blipFill>
-          <a:blip r:embed="rId2">
+          <a:blip r:embed="rId1">
             <a:extLst>
               <a:ext uri="{28A0092B-C50C-407E-A947-70E740481C1C}">
                 <a14:useLocalDpi xmlns:a14="http://schemas.microsoft.com/office/drawing/2010/main" val="0"/>
@@ -3838,20 +3367,14 @@
       </p:pic>
       <p:pic>
         <p:nvPicPr>
-          <p:cNvPr id="27" name="图片 26">
-            <a:extLst>
-              <a:ext uri="{FF2B5EF4-FFF2-40B4-BE49-F238E27FC236}">
-                <a16:creationId xmlns:a16="http://schemas.microsoft.com/office/drawing/2014/main" id="{02E0B50E-5E42-401C-99B7-0A1F33F51098}"/>
-              </a:ext>
-            </a:extLst>
-          </p:cNvPr>
+          <p:cNvPr id="27" name="图片 26"/>
           <p:cNvPicPr>
             <a:picLocks noChangeAspect="1"/>
           </p:cNvPicPr>
           <p:nvPr/>
         </p:nvPicPr>
         <p:blipFill>
-          <a:blip r:embed="rId3">
+          <a:blip r:embed="rId2">
             <a:extLst>
               <a:ext uri="{28A0092B-C50C-407E-A947-70E740481C1C}">
                 <a14:useLocalDpi xmlns:a14="http://schemas.microsoft.com/office/drawing/2010/main" val="0"/>
@@ -3874,20 +3397,14 @@
       </p:pic>
       <p:pic>
         <p:nvPicPr>
-          <p:cNvPr id="2" name="图片 1">
-            <a:extLst>
-              <a:ext uri="{FF2B5EF4-FFF2-40B4-BE49-F238E27FC236}">
-                <a16:creationId xmlns:a16="http://schemas.microsoft.com/office/drawing/2014/main" id="{F87F481C-E817-42B6-B9DE-6C98B2FF860C}"/>
-              </a:ext>
-            </a:extLst>
-          </p:cNvPr>
+          <p:cNvPr id="2" name="图片 1"/>
           <p:cNvPicPr>
             <a:picLocks noChangeAspect="1"/>
           </p:cNvPicPr>
           <p:nvPr/>
         </p:nvPicPr>
         <p:blipFill>
-          <a:blip r:embed="rId4"/>
+          <a:blip r:embed="rId3"/>
           <a:stretch>
             <a:fillRect/>
           </a:stretch>
@@ -3902,12 +3419,100 @@
           </a:prstGeom>
         </p:spPr>
       </p:pic>
+      <p:pic>
+        <p:nvPicPr>
+          <p:cNvPr id="17" name="图片 16"/>
+          <p:cNvPicPr>
+            <a:picLocks noChangeAspect="1"/>
+          </p:cNvPicPr>
+          <p:nvPr/>
+        </p:nvPicPr>
+        <p:blipFill>
+          <a:blip r:embed="rId4">
+            <a:extLst>
+              <a:ext uri="{28A0092B-C50C-407E-A947-70E740481C1C}">
+                <a14:useLocalDpi xmlns:a14="http://schemas.microsoft.com/office/drawing/2010/main" val="0"/>
+              </a:ext>
+            </a:extLst>
+          </a:blip>
+          <a:stretch>
+            <a:fillRect/>
+          </a:stretch>
+        </p:blipFill>
+        <p:spPr>
+          <a:xfrm>
+            <a:off x="6192855" y="628383"/>
+            <a:ext cx="1899824" cy="628574"/>
+          </a:xfrm>
+          <a:prstGeom prst="rect">
+            <a:avLst/>
+          </a:prstGeom>
+        </p:spPr>
+      </p:pic>
+      <p:sp>
+        <p:nvSpPr>
+          <p:cNvPr id="14" name="文本框 13"/>
+          <p:cNvSpPr txBox="1"/>
+          <p:nvPr/>
+        </p:nvSpPr>
+        <p:spPr>
+          <a:xfrm>
+            <a:off x="6373041" y="1586915"/>
+            <a:ext cx="1719638" cy="646331"/>
+          </a:xfrm>
+          <a:prstGeom prst="rect">
+            <a:avLst/>
+          </a:prstGeom>
+          <a:noFill/>
+        </p:spPr>
+        <p:txBody>
+          <a:bodyPr wrap="none" rtlCol="0">
+            <a:spAutoFit/>
+          </a:bodyPr>
+          <a:lstStyle/>
+          <a:p>
+            <a:pPr algn="ctr"/>
+            <a:r>
+              <a:rPr lang="en-US" altLang="zh-CN" b="1" dirty="0">
+                <a:solidFill>
+                  <a:schemeClr val="bg2">
+                    <a:lumMod val="75000"/>
+                  </a:schemeClr>
+                </a:solidFill>
+              </a:rPr>
+              <a:t>Visiting Scholar </a:t>
+            </a:r>
+            <a:endParaRPr lang="en-US" altLang="zh-CN" b="1" dirty="0">
+              <a:solidFill>
+                <a:schemeClr val="bg2">
+                  <a:lumMod val="75000"/>
+                </a:schemeClr>
+              </a:solidFill>
+            </a:endParaRPr>
+          </a:p>
+          <a:p>
+            <a:pPr algn="ctr"/>
+            <a:r>
+              <a:rPr lang="en-US" altLang="zh-CN" b="1" dirty="0">
+                <a:solidFill>
+                  <a:schemeClr val="bg2">
+                    <a:lumMod val="75000"/>
+                  </a:schemeClr>
+                </a:solidFill>
+              </a:rPr>
+              <a:t>(2024-2025)</a:t>
+            </a:r>
+            <a:endParaRPr lang="en-US" b="1" dirty="0">
+              <a:solidFill>
+                <a:schemeClr val="bg2">
+                  <a:lumMod val="75000"/>
+                </a:schemeClr>
+              </a:solidFill>
+            </a:endParaRPr>
+          </a:p>
+        </p:txBody>
+      </p:sp>
     </p:spTree>
-    <p:extLst>
-      <p:ext uri="{BB962C8B-B14F-4D97-AF65-F5344CB8AC3E}">
-        <p14:creationId xmlns:p14="http://schemas.microsoft.com/office/powerpoint/2010/main" val="673240905"/>
-      </p:ext>
-    </p:extLst>
   </p:cSld>
   <p:clrMapOvr>
     <a:masterClrMapping/>
@@ -3958,7 +3563,7 @@
     </a:clrScheme>
     <a:fontScheme name="Office">
       <a:majorFont>
-        <a:latin typeface="Calibri Light" panose="020F0302020204030204"/>
+        <a:latin typeface="Calibri Light"/>
         <a:ea typeface=""/>
         <a:cs typeface=""/>
         <a:font script="Jpan" typeface="游ゴシック Light"/>
@@ -3991,26 +3596,9 @@
         <a:font script="Viet" typeface="Times New Roman"/>
         <a:font script="Uigh" typeface="Microsoft Uighur"/>
         <a:font script="Geor" typeface="Sylfaen"/>
-        <a:font script="Armn" typeface="Arial"/>
-        <a:font script="Bugi" typeface="Leelawadee UI"/>
-        <a:font script="Bopo" typeface="Microsoft JhengHei"/>
-        <a:font script="Java" typeface="Javanese Text"/>
-        <a:font script="Lisu" typeface="Segoe UI"/>
-        <a:font script="Mymr" typeface="Myanmar Text"/>
-        <a:font script="Nkoo" typeface="Ebrima"/>
-        <a:font script="Olck" typeface="Nirmala UI"/>
-        <a:font script="Osma" typeface="Ebrima"/>
-        <a:font script="Phag" typeface="Phagspa"/>
-        <a:font script="Syrn" typeface="Estrangelo Edessa"/>
-        <a:font script="Syrj" typeface="Estrangelo Edessa"/>
-        <a:font script="Syre" typeface="Estrangelo Edessa"/>
-        <a:font script="Sora" typeface="Nirmala UI"/>
-        <a:font script="Tale" typeface="Microsoft Tai Le"/>
-        <a:font script="Talu" typeface="Microsoft New Tai Lue"/>
-        <a:font script="Tfng" typeface="Ebrima"/>
       </a:majorFont>
       <a:minorFont>
-        <a:latin typeface="Calibri" panose="020F0502020204030204"/>
+        <a:latin typeface="Calibri"/>
         <a:ea typeface=""/>
         <a:cs typeface=""/>
         <a:font script="Jpan" typeface="游ゴシック"/>
@@ -4043,23 +3631,6 @@
         <a:font script="Viet" typeface="Arial"/>
         <a:font script="Uigh" typeface="Microsoft Uighur"/>
         <a:font script="Geor" typeface="Sylfaen"/>
-        <a:font script="Armn" typeface="Arial"/>
-        <a:font script="Bugi" typeface="Leelawadee UI"/>
-        <a:font script="Bopo" typeface="Microsoft JhengHei"/>
-        <a:font script="Java" typeface="Javanese Text"/>
-        <a:font script="Lisu" typeface="Segoe UI"/>
-        <a:font script="Mymr" typeface="Myanmar Text"/>
-        <a:font script="Nkoo" typeface="Ebrima"/>
-        <a:font script="Olck" typeface="Nirmala UI"/>
-        <a:font script="Osma" typeface="Ebrima"/>
-        <a:font script="Phag" typeface="Phagspa"/>
-        <a:font script="Syrn" typeface="Estrangelo Edessa"/>
-        <a:font script="Syrj" typeface="Estrangelo Edessa"/>
-        <a:font script="Syre" typeface="Estrangelo Edessa"/>
-        <a:font script="Sora" typeface="Nirmala UI"/>
-        <a:font script="Tale" typeface="Microsoft Tai Le"/>
-        <a:font script="Talu" typeface="Microsoft New Tai Lue"/>
-        <a:font script="Tfng" typeface="Ebrima"/>
       </a:minorFont>
     </a:fontScheme>
     <a:fmtScheme name="Office">
@@ -4200,8 +3771,6 @@
       </a:bgFillStyleLst>
     </a:fmtScheme>
   </a:themeElements>
-  <a:objectDefaults/>
-  <a:extraClrSchemeLst/>
   <a:extLst>
     <a:ext uri="{05A4C25C-085E-4340-85A3-A5531E510DB2}">
       <thm15:themeFamily xmlns:thm15="http://schemas.microsoft.com/office/thememl/2012/main" name="Office Theme" id="{62F939B6-93AF-4DB8-9C6B-D6C7DFDC589F}" vid="{4A3C46E8-61CC-4603-A589-7422A47A8E4A}"/>
